--- a/decks/Trans_04_Component-Therapy-and-Massive-Transfusion.pptx
+++ b/decks/Trans_04_Component-Therapy-and-Massive-Transfusion.pptx
@@ -30,9 +30,13 @@
     <p:sldId id="278" r:id="rId24"/>
     <p:sldId id="279" r:id="rId25"/>
     <p:sldId id="280" r:id="rId26"/>
+    <p:sldId id="289" r:id="rId40"/>
     <p:sldId id="281" r:id="rId27"/>
+    <p:sldId id="288" r:id="rId39"/>
     <p:sldId id="282" r:id="rId28"/>
+    <p:sldId id="287" r:id="rId38"/>
     <p:sldId id="283" r:id="rId29"/>
+    <p:sldId id="286" r:id="rId37"/>
     <p:sldId id="284" r:id="rId30"/>
     <p:sldId id="285" r:id="rId31"/>
   </p:sldIdLst>
@@ -3477,6 +3481,10 @@
           </a:solidFill>
           <a:ln/>
         </p:spPr>
+        <p:txBody>
+          <a:bodyPr/>
+          <a:p/>
+        </p:txBody>
       </p:sp>
       <p:sp>
         <p:nvSpPr>
@@ -3499,6 +3507,10 @@
           </a:solidFill>
           <a:ln/>
         </p:spPr>
+        <p:txBody>
+          <a:bodyPr/>
+          <a:p/>
+        </p:txBody>
       </p:sp>
       <p:sp>
         <p:nvSpPr>
@@ -3521,6 +3533,10 @@
           </a:solidFill>
           <a:ln/>
         </p:spPr>
+        <p:txBody>
+          <a:bodyPr/>
+          <a:p/>
+        </p:txBody>
       </p:sp>
       <p:sp>
         <p:nvSpPr>
@@ -3543,6 +3559,10 @@
           </a:solidFill>
           <a:ln/>
         </p:spPr>
+        <p:txBody>
+          <a:bodyPr/>
+          <a:p/>
+        </p:txBody>
       </p:sp>
       <p:sp>
         <p:nvSpPr>
@@ -3959,6 +3979,10 @@
             </a:outerShdw>
           </a:effectLst>
         </p:spPr>
+        <p:txBody>
+          <a:bodyPr/>
+          <a:p/>
+        </p:txBody>
       </p:sp>
       <p:sp>
         <p:nvSpPr>
@@ -4133,6 +4157,10 @@
             </a:outerShdw>
           </a:effectLst>
         </p:spPr>
+        <p:txBody>
+          <a:bodyPr/>
+          <a:p/>
+        </p:txBody>
       </p:sp>
       <p:sp>
         <p:nvSpPr>
@@ -4544,6 +4572,10 @@
             </a:outerShdw>
           </a:effectLst>
         </p:spPr>
+        <p:txBody>
+          <a:bodyPr/>
+          <a:p/>
+        </p:txBody>
       </p:sp>
       <p:sp>
         <p:nvSpPr>
@@ -4718,6 +4750,10 @@
             </a:outerShdw>
           </a:effectLst>
         </p:spPr>
+        <p:txBody>
+          <a:bodyPr/>
+          <a:p/>
+        </p:txBody>
       </p:sp>
       <p:sp>
         <p:nvSpPr>
@@ -5023,6 +5059,10 @@
           </a:solidFill>
           <a:ln/>
         </p:spPr>
+        <p:txBody>
+          <a:bodyPr/>
+          <a:p/>
+        </p:txBody>
       </p:sp>
       <p:sp>
         <p:nvSpPr>
@@ -5045,6 +5085,10 @@
           </a:solidFill>
           <a:ln/>
         </p:spPr>
+        <p:txBody>
+          <a:bodyPr/>
+          <a:p/>
+        </p:txBody>
       </p:sp>
       <p:sp>
         <p:nvSpPr>
@@ -5306,6 +5350,10 @@
             </a:outerShdw>
           </a:effectLst>
         </p:spPr>
+        <p:txBody>
+          <a:bodyPr/>
+          <a:p/>
+        </p:txBody>
       </p:sp>
       <p:pic>
         <p:nvPicPr>
@@ -5614,6 +5662,10 @@
             </a:outerShdw>
           </a:effectLst>
         </p:spPr>
+        <p:txBody>
+          <a:bodyPr/>
+          <a:p/>
+        </p:txBody>
       </p:sp>
       <p:sp>
         <p:nvSpPr>
@@ -5788,6 +5840,10 @@
             </a:outerShdw>
           </a:effectLst>
         </p:spPr>
+        <p:txBody>
+          <a:bodyPr/>
+          <a:p/>
+        </p:txBody>
       </p:sp>
       <p:sp>
         <p:nvSpPr>
@@ -6183,6 +6239,10 @@
             </a:outerShdw>
           </a:effectLst>
         </p:spPr>
+        <p:txBody>
+          <a:bodyPr/>
+          <a:p/>
+        </p:txBody>
       </p:sp>
       <p:pic>
         <p:nvPicPr>
@@ -6491,6 +6551,10 @@
             </a:outerShdw>
           </a:effectLst>
         </p:spPr>
+        <p:txBody>
+          <a:bodyPr/>
+          <a:p/>
+        </p:txBody>
       </p:sp>
       <p:sp>
         <p:nvSpPr>
@@ -6665,6 +6729,10 @@
             </a:outerShdw>
           </a:effectLst>
         </p:spPr>
+        <p:txBody>
+          <a:bodyPr/>
+          <a:p/>
+        </p:txBody>
       </p:sp>
       <p:sp>
         <p:nvSpPr>
@@ -6970,6 +7038,10 @@
           </a:solidFill>
           <a:ln/>
         </p:spPr>
+        <p:txBody>
+          <a:bodyPr/>
+          <a:p/>
+        </p:txBody>
       </p:sp>
       <p:sp>
         <p:nvSpPr>
@@ -6992,6 +7064,10 @@
           </a:solidFill>
           <a:ln/>
         </p:spPr>
+        <p:txBody>
+          <a:bodyPr/>
+          <a:p/>
+        </p:txBody>
       </p:sp>
       <p:sp>
         <p:nvSpPr>
@@ -7248,6 +7324,10 @@
             </a:outerShdw>
           </a:effectLst>
         </p:spPr>
+        <p:txBody>
+          <a:bodyPr/>
+          <a:p/>
+        </p:txBody>
       </p:sp>
       <p:sp>
         <p:nvSpPr>
@@ -7358,6 +7438,10 @@
             </a:outerShdw>
           </a:effectLst>
         </p:spPr>
+        <p:txBody>
+          <a:bodyPr/>
+          <a:p/>
+        </p:txBody>
       </p:sp>
       <p:sp>
         <p:nvSpPr>
@@ -7787,6 +7871,10 @@
             </a:outerShdw>
           </a:effectLst>
         </p:spPr>
+        <p:txBody>
+          <a:bodyPr/>
+          <a:p/>
+        </p:txBody>
       </p:sp>
       <p:sp>
         <p:nvSpPr>
@@ -8113,6 +8201,10 @@
             </a:outerShdw>
           </a:effectLst>
         </p:spPr>
+        <p:txBody>
+          <a:bodyPr/>
+          <a:p/>
+        </p:txBody>
       </p:sp>
       <p:sp>
         <p:nvSpPr>
@@ -8220,6 +8312,10 @@
             </a:outerShdw>
           </a:effectLst>
         </p:spPr>
+        <p:txBody>
+          <a:bodyPr/>
+          <a:p/>
+        </p:txBody>
       </p:sp>
       <p:sp>
         <p:nvSpPr>
@@ -8327,6 +8423,10 @@
             </a:outerShdw>
           </a:effectLst>
         </p:spPr>
+        <p:txBody>
+          <a:bodyPr/>
+          <a:p/>
+        </p:txBody>
       </p:sp>
       <p:sp>
         <p:nvSpPr>
@@ -8434,6 +8534,10 @@
             </a:outerShdw>
           </a:effectLst>
         </p:spPr>
+        <p:txBody>
+          <a:bodyPr/>
+          <a:p/>
+        </p:txBody>
       </p:sp>
       <p:sp>
         <p:nvSpPr>
@@ -8764,6 +8868,10 @@
             </a:outerShdw>
           </a:effectLst>
         </p:spPr>
+        <p:txBody>
+          <a:bodyPr/>
+          <a:p/>
+        </p:txBody>
       </p:sp>
       <p:sp>
         <p:nvSpPr>
@@ -8874,6 +8982,10 @@
             </a:outerShdw>
           </a:effectLst>
         </p:spPr>
+        <p:txBody>
+          <a:bodyPr/>
+          <a:p/>
+        </p:txBody>
       </p:sp>
       <p:sp>
         <p:nvSpPr>
@@ -9303,6 +9415,10 @@
             </a:outerShdw>
           </a:effectLst>
         </p:spPr>
+        <p:txBody>
+          <a:bodyPr/>
+          <a:p/>
+        </p:txBody>
       </p:sp>
       <p:sp>
         <p:nvSpPr>
@@ -9629,6 +9745,10 @@
             </a:outerShdw>
           </a:effectLst>
         </p:spPr>
+        <p:txBody>
+          <a:bodyPr/>
+          <a:p/>
+        </p:txBody>
       </p:sp>
       <p:sp>
         <p:nvSpPr>
@@ -9739,6 +9859,10 @@
             </a:outerShdw>
           </a:effectLst>
         </p:spPr>
+        <p:txBody>
+          <a:bodyPr/>
+          <a:p/>
+        </p:txBody>
       </p:sp>
       <p:sp>
         <p:nvSpPr>
@@ -10168,6 +10292,10 @@
             </a:outerShdw>
           </a:effectLst>
         </p:spPr>
+        <p:txBody>
+          <a:bodyPr/>
+          <a:p/>
+        </p:txBody>
       </p:sp>
       <p:sp>
         <p:nvSpPr>
@@ -10409,6 +10537,10 @@
           </a:solidFill>
           <a:ln/>
         </p:spPr>
+        <p:txBody>
+          <a:bodyPr/>
+          <a:p/>
+        </p:txBody>
       </p:sp>
       <p:sp>
         <p:nvSpPr>
@@ -10431,6 +10563,10 @@
           </a:solidFill>
           <a:ln/>
         </p:spPr>
+        <p:txBody>
+          <a:bodyPr/>
+          <a:p/>
+        </p:txBody>
       </p:sp>
       <p:sp>
         <p:nvSpPr>
@@ -10769,9 +10905,9 @@
               <a:buNone/>
             </a:pPr>
             <a:r>
-              <a:rPr lang="en-US" sz="1350" b="1" dirty="0">
-                <a:solidFill>
-                  <a:srgbClr val="7A0E3C"/>
+              <a:rPr lang="en-US" sz="1350" b="0" dirty="0">
+                <a:solidFill>
+                  <a:srgbClr val="33444F"/>
                 </a:solidFill>
                 <a:latin typeface="Calibri" pitchFamily="34" charset="0"/>
                 <a:ea typeface="Calibri" pitchFamily="34" charset="-122"/>
@@ -10820,130 +10956,6 @@
               <a:t>E. Transfuse all symptomatic and asymptomatic anemia</a:t>
             </a:r>
             <a:endParaRPr lang="en-US" sz="1350" dirty="0"/>
-          </a:p>
-        </p:txBody>
-      </p:sp>
-      <p:sp>
-        <p:nvSpPr>
-          <p:cNvPr id="6" name="Shape 4"/>
-          <p:cNvSpPr/>
-          <p:nvPr/>
-        </p:nvSpPr>
-        <p:spPr>
-          <a:xfrm>
-            <a:off x="7201632" y="2395728"/>
-            <a:ext cx="4423136" cy="3246120"/>
-          </a:xfrm>
-          <a:prstGeom prst="roundRect">
-            <a:avLst>
-              <a:gd name="adj" fmla="val 2535"/>
-            </a:avLst>
-          </a:prstGeom>
-          <a:solidFill>
-            <a:srgbClr val="F8E7EF"/>
-          </a:solidFill>
-          <a:ln/>
-          <a:effectLst>
-            <a:outerShdw sx="100000" sy="100000" kx="0" ky="0" algn="bl" rotWithShape="0" blurRad="88900" dist="25400" dir="5400000">
-              <a:srgbClr val="22303C">
-                <a:alpha val="12000"/>
-              </a:srgbClr>
-            </a:outerShdw>
-          </a:effectLst>
-        </p:spPr>
-      </p:sp>
-      <p:sp>
-        <p:nvSpPr>
-          <p:cNvPr id="7" name="Text 5"/>
-          <p:cNvSpPr/>
-          <p:nvPr/>
-        </p:nvSpPr>
-        <p:spPr>
-          <a:xfrm>
-            <a:off x="7439376" y="2578608"/>
-            <a:ext cx="3965936" cy="457200"/>
-          </a:xfrm>
-          <a:prstGeom prst="rect">
-            <a:avLst/>
-          </a:prstGeom>
-          <a:noFill/>
-          <a:ln/>
-        </p:spPr>
-        <p:txBody>
-          <a:bodyPr wrap="square" lIns="0" tIns="0" rIns="0" bIns="0" rtlCol="0" anchor="ctr"/>
-          <a:lstStyle/>
-          <a:p>
-            <a:pPr indent="0" marL="0">
-              <a:buNone/>
-            </a:pPr>
-            <a:r>
-              <a:rPr lang="en-US" sz="1500" b="1" dirty="0">
-                <a:solidFill>
-                  <a:srgbClr val="AD1457"/>
-                </a:solidFill>
-                <a:latin typeface="Calibri" pitchFamily="34" charset="0"/>
-                <a:ea typeface="Calibri" pitchFamily="34" charset="-122"/>
-                <a:cs typeface="Calibri" pitchFamily="34" charset="-120"/>
-              </a:rPr>
-              <a:t>ANSWER  </a:t>
-            </a:r>
-            <a:pPr indent="0" marL="0">
-              <a:buNone/>
-            </a:pPr>
-            <a:r>
-              <a:rPr lang="en-US" sz="1500" b="1" dirty="0">
-                <a:solidFill>
-                  <a:srgbClr val="1B2A38"/>
-                </a:solidFill>
-                <a:latin typeface="Calibri" pitchFamily="34" charset="0"/>
-                <a:ea typeface="Calibri" pitchFamily="34" charset="-122"/>
-                <a:cs typeface="Calibri" pitchFamily="34" charset="-120"/>
-              </a:rPr>
-              <a:t>C — Restrictive threshold ~7 g/dL</a:t>
-            </a:r>
-            <a:endParaRPr lang="en-US" sz="1500" dirty="0"/>
-          </a:p>
-        </p:txBody>
-      </p:sp>
-      <p:sp>
-        <p:nvSpPr>
-          <p:cNvPr id="8" name="Text 6"/>
-          <p:cNvSpPr/>
-          <p:nvPr/>
-        </p:nvSpPr>
-        <p:spPr>
-          <a:xfrm>
-            <a:off x="7439376" y="3127248"/>
-            <a:ext cx="3947648" cy="2377440"/>
-          </a:xfrm>
-          <a:prstGeom prst="rect">
-            <a:avLst/>
-          </a:prstGeom>
-          <a:noFill/>
-          <a:ln/>
-        </p:spPr>
-        <p:txBody>
-          <a:bodyPr wrap="square" lIns="0" tIns="0" rIns="0" bIns="0" rtlCol="0" anchor="t"/>
-          <a:lstStyle/>
-          <a:p>
-            <a:pPr algn="l" indent="0" marL="0">
-              <a:lnSpc>
-                <a:spcPct val="108000"/>
-              </a:lnSpc>
-              <a:buNone/>
-            </a:pPr>
-            <a:r>
-              <a:rPr lang="en-US" sz="1250" dirty="0">
-                <a:solidFill>
-                  <a:srgbClr val="33444F"/>
-                </a:solidFill>
-                <a:latin typeface="Calibri" pitchFamily="34" charset="0"/>
-                <a:ea typeface="Calibri" pitchFamily="34" charset="-122"/>
-                <a:cs typeface="Calibri" pitchFamily="34" charset="-120"/>
-              </a:rPr>
-              <a:t>Randomized data show a restrictive strategy (~7 g/dL, ~8 in selected cardiac/peri-operative patients) is as safe as a liberal strategy and reduces exposure. Transfuse for symptoms, not a number.</a:t>
-            </a:r>
-            <a:endParaRPr lang="en-US" sz="1250" dirty="0"/>
           </a:p>
         </p:txBody>
       </p:sp>
@@ -11273,9 +11285,9 @@
               <a:buNone/>
             </a:pPr>
             <a:r>
-              <a:rPr lang="en-US" sz="1350" b="1" dirty="0">
-                <a:solidFill>
-                  <a:srgbClr val="7A0E3C"/>
+              <a:rPr lang="en-US" sz="1350" b="0" dirty="0">
+                <a:solidFill>
+                  <a:srgbClr val="33444F"/>
                 </a:solidFill>
                 <a:latin typeface="Calibri" pitchFamily="34" charset="0"/>
                 <a:ea typeface="Calibri" pitchFamily="34" charset="-122"/>
@@ -11324,130 +11336,6 @@
               <a:t>E. Normal saline</a:t>
             </a:r>
             <a:endParaRPr lang="en-US" sz="1350" dirty="0"/>
-          </a:p>
-        </p:txBody>
-      </p:sp>
-      <p:sp>
-        <p:nvSpPr>
-          <p:cNvPr id="6" name="Shape 4"/>
-          <p:cNvSpPr/>
-          <p:nvPr/>
-        </p:nvSpPr>
-        <p:spPr>
-          <a:xfrm>
-            <a:off x="7201632" y="2395728"/>
-            <a:ext cx="4423136" cy="3246120"/>
-          </a:xfrm>
-          <a:prstGeom prst="roundRect">
-            <a:avLst>
-              <a:gd name="adj" fmla="val 2535"/>
-            </a:avLst>
-          </a:prstGeom>
-          <a:solidFill>
-            <a:srgbClr val="F8E7EF"/>
-          </a:solidFill>
-          <a:ln/>
-          <a:effectLst>
-            <a:outerShdw sx="100000" sy="100000" kx="0" ky="0" algn="bl" rotWithShape="0" blurRad="88900" dist="25400" dir="5400000">
-              <a:srgbClr val="22303C">
-                <a:alpha val="12000"/>
-              </a:srgbClr>
-            </a:outerShdw>
-          </a:effectLst>
-        </p:spPr>
-      </p:sp>
-      <p:sp>
-        <p:nvSpPr>
-          <p:cNvPr id="7" name="Text 5"/>
-          <p:cNvSpPr/>
-          <p:nvPr/>
-        </p:nvSpPr>
-        <p:spPr>
-          <a:xfrm>
-            <a:off x="7439376" y="2578608"/>
-            <a:ext cx="3965936" cy="457200"/>
-          </a:xfrm>
-          <a:prstGeom prst="rect">
-            <a:avLst/>
-          </a:prstGeom>
-          <a:noFill/>
-          <a:ln/>
-        </p:spPr>
-        <p:txBody>
-          <a:bodyPr wrap="square" lIns="0" tIns="0" rIns="0" bIns="0" rtlCol="0" anchor="ctr"/>
-          <a:lstStyle/>
-          <a:p>
-            <a:pPr indent="0" marL="0">
-              <a:buNone/>
-            </a:pPr>
-            <a:r>
-              <a:rPr lang="en-US" sz="1500" b="1" dirty="0">
-                <a:solidFill>
-                  <a:srgbClr val="AD1457"/>
-                </a:solidFill>
-                <a:latin typeface="Calibri" pitchFamily="34" charset="0"/>
-                <a:ea typeface="Calibri" pitchFamily="34" charset="-122"/>
-                <a:cs typeface="Calibri" pitchFamily="34" charset="-120"/>
-              </a:rPr>
-              <a:t>ANSWER  </a:t>
-            </a:r>
-            <a:pPr indent="0" marL="0">
-              <a:buNone/>
-            </a:pPr>
-            <a:r>
-              <a:rPr lang="en-US" sz="1500" b="1" dirty="0">
-                <a:solidFill>
-                  <a:srgbClr val="1B2A38"/>
-                </a:solidFill>
-                <a:latin typeface="Calibri" pitchFamily="34" charset="0"/>
-                <a:ea typeface="Calibri" pitchFamily="34" charset="-122"/>
-                <a:cs typeface="Calibri" pitchFamily="34" charset="-120"/>
-              </a:rPr>
-              <a:t>C — Cryoprecipitate</a:t>
-            </a:r>
-            <a:endParaRPr lang="en-US" sz="1500" dirty="0"/>
-          </a:p>
-        </p:txBody>
-      </p:sp>
-      <p:sp>
-        <p:nvSpPr>
-          <p:cNvPr id="8" name="Text 6"/>
-          <p:cNvSpPr/>
-          <p:nvPr/>
-        </p:nvSpPr>
-        <p:spPr>
-          <a:xfrm>
-            <a:off x="7439376" y="3127248"/>
-            <a:ext cx="3947648" cy="2377440"/>
-          </a:xfrm>
-          <a:prstGeom prst="rect">
-            <a:avLst/>
-          </a:prstGeom>
-          <a:noFill/>
-          <a:ln/>
-        </p:spPr>
-        <p:txBody>
-          <a:bodyPr wrap="square" lIns="0" tIns="0" rIns="0" bIns="0" rtlCol="0" anchor="t"/>
-          <a:lstStyle/>
-          <a:p>
-            <a:pPr algn="l" indent="0" marL="0">
-              <a:lnSpc>
-                <a:spcPct val="108000"/>
-              </a:lnSpc>
-              <a:buNone/>
-            </a:pPr>
-            <a:r>
-              <a:rPr lang="en-US" sz="1250" dirty="0">
-                <a:solidFill>
-                  <a:srgbClr val="33444F"/>
-                </a:solidFill>
-                <a:latin typeface="Calibri" pitchFamily="34" charset="0"/>
-                <a:ea typeface="Calibri" pitchFamily="34" charset="-122"/>
-                <a:cs typeface="Calibri" pitchFamily="34" charset="-120"/>
-              </a:rPr>
-              <a:t>Cryoprecipitate is the concentrated source of fibrinogen (also FVIII, vWF, FXIII) and is first-line for hypofibrinogenemia. Fibrinogen concentrate is an alternative where available.</a:t>
-            </a:r>
-            <a:endParaRPr lang="en-US" sz="1250" dirty="0"/>
           </a:p>
         </p:txBody>
       </p:sp>
@@ -11757,9 +11645,9 @@
               <a:buNone/>
             </a:pPr>
             <a:r>
-              <a:rPr lang="en-US" sz="1350" b="1" dirty="0">
-                <a:solidFill>
-                  <a:srgbClr val="7A0E3C"/>
+              <a:rPr lang="en-US" sz="1350" b="0" dirty="0">
+                <a:solidFill>
+                  <a:srgbClr val="33444F"/>
                 </a:solidFill>
                 <a:latin typeface="Calibri" pitchFamily="34" charset="0"/>
                 <a:ea typeface="Calibri" pitchFamily="34" charset="-122"/>
@@ -11828,130 +11716,6 @@
               <a:t>E. No action needed</a:t>
             </a:r>
             <a:endParaRPr lang="en-US" sz="1350" dirty="0"/>
-          </a:p>
-        </p:txBody>
-      </p:sp>
-      <p:sp>
-        <p:nvSpPr>
-          <p:cNvPr id="6" name="Shape 4"/>
-          <p:cNvSpPr/>
-          <p:nvPr/>
-        </p:nvSpPr>
-        <p:spPr>
-          <a:xfrm>
-            <a:off x="7201632" y="2395728"/>
-            <a:ext cx="4423136" cy="3246120"/>
-          </a:xfrm>
-          <a:prstGeom prst="roundRect">
-            <a:avLst>
-              <a:gd name="adj" fmla="val 2535"/>
-            </a:avLst>
-          </a:prstGeom>
-          <a:solidFill>
-            <a:srgbClr val="F8E7EF"/>
-          </a:solidFill>
-          <a:ln/>
-          <a:effectLst>
-            <a:outerShdw sx="100000" sy="100000" kx="0" ky="0" algn="bl" rotWithShape="0" blurRad="88900" dist="25400" dir="5400000">
-              <a:srgbClr val="22303C">
-                <a:alpha val="12000"/>
-              </a:srgbClr>
-            </a:outerShdw>
-          </a:effectLst>
-        </p:spPr>
-      </p:sp>
-      <p:sp>
-        <p:nvSpPr>
-          <p:cNvPr id="7" name="Text 5"/>
-          <p:cNvSpPr/>
-          <p:nvPr/>
-        </p:nvSpPr>
-        <p:spPr>
-          <a:xfrm>
-            <a:off x="7439376" y="2578608"/>
-            <a:ext cx="3965936" cy="457200"/>
-          </a:xfrm>
-          <a:prstGeom prst="rect">
-            <a:avLst/>
-          </a:prstGeom>
-          <a:noFill/>
-          <a:ln/>
-        </p:spPr>
-        <p:txBody>
-          <a:bodyPr wrap="square" lIns="0" tIns="0" rIns="0" bIns="0" rtlCol="0" anchor="ctr"/>
-          <a:lstStyle/>
-          <a:p>
-            <a:pPr indent="0" marL="0">
-              <a:buNone/>
-            </a:pPr>
-            <a:r>
-              <a:rPr lang="en-US" sz="1500" b="1" dirty="0">
-                <a:solidFill>
-                  <a:srgbClr val="AD1457"/>
-                </a:solidFill>
-                <a:latin typeface="Calibri" pitchFamily="34" charset="0"/>
-                <a:ea typeface="Calibri" pitchFamily="34" charset="-122"/>
-                <a:cs typeface="Calibri" pitchFamily="34" charset="-120"/>
-              </a:rPr>
-              <a:t>ANSWER  </a:t>
-            </a:r>
-            <a:pPr indent="0" marL="0">
-              <a:buNone/>
-            </a:pPr>
-            <a:r>
-              <a:rPr lang="en-US" sz="1500" b="1" dirty="0">
-                <a:solidFill>
-                  <a:srgbClr val="1B2A38"/>
-                </a:solidFill>
-                <a:latin typeface="Calibri" pitchFamily="34" charset="0"/>
-                <a:ea typeface="Calibri" pitchFamily="34" charset="-122"/>
-                <a:cs typeface="Calibri" pitchFamily="34" charset="-120"/>
-              </a:rPr>
-              <a:t>B — Ionized calcium; replace calcium</a:t>
-            </a:r>
-            <a:endParaRPr lang="en-US" sz="1500" dirty="0"/>
-          </a:p>
-        </p:txBody>
-      </p:sp>
-      <p:sp>
-        <p:nvSpPr>
-          <p:cNvPr id="8" name="Text 6"/>
-          <p:cNvSpPr/>
-          <p:nvPr/>
-        </p:nvSpPr>
-        <p:spPr>
-          <a:xfrm>
-            <a:off x="7439376" y="3127248"/>
-            <a:ext cx="3947648" cy="2377440"/>
-          </a:xfrm>
-          <a:prstGeom prst="rect">
-            <a:avLst/>
-          </a:prstGeom>
-          <a:noFill/>
-          <a:ln/>
-        </p:spPr>
-        <p:txBody>
-          <a:bodyPr wrap="square" lIns="0" tIns="0" rIns="0" bIns="0" rtlCol="0" anchor="t"/>
-          <a:lstStyle/>
-          <a:p>
-            <a:pPr algn="l" indent="0" marL="0">
-              <a:lnSpc>
-                <a:spcPct val="108000"/>
-              </a:lnSpc>
-              <a:buNone/>
-            </a:pPr>
-            <a:r>
-              <a:rPr lang="en-US" sz="1250" dirty="0">
-                <a:solidFill>
-                  <a:srgbClr val="33444F"/>
-                </a:solidFill>
-                <a:latin typeface="Calibri" pitchFamily="34" charset="0"/>
-                <a:ea typeface="Calibri" pitchFamily="34" charset="-122"/>
-                <a:cs typeface="Calibri" pitchFamily="34" charset="-120"/>
-              </a:rPr>
-              <a:t>Citrate chelates ionized calcium. Measure ionized (not total) calcium and replace it. Hypothermia and hyperkalemia should also be monitored during massive transfusion.</a:t>
-            </a:r>
-            <a:endParaRPr lang="en-US" sz="1250" dirty="0"/>
           </a:p>
         </p:txBody>
       </p:sp>
@@ -12281,9 +12045,9 @@
               <a:buNone/>
             </a:pPr>
             <a:r>
-              <a:rPr lang="en-US" sz="1350" b="1" dirty="0">
-                <a:solidFill>
-                  <a:srgbClr val="7A0E3C"/>
+              <a:rPr lang="en-US" sz="1350" b="0" dirty="0">
+                <a:solidFill>
+                  <a:srgbClr val="33444F"/>
                 </a:solidFill>
                 <a:latin typeface="Calibri" pitchFamily="34" charset="0"/>
                 <a:ea typeface="Calibri" pitchFamily="34" charset="-122"/>
@@ -12332,130 +12096,6 @@
               <a:t>E. Dilution</a:t>
             </a:r>
             <a:endParaRPr lang="en-US" sz="1350" dirty="0"/>
-          </a:p>
-        </p:txBody>
-      </p:sp>
-      <p:sp>
-        <p:nvSpPr>
-          <p:cNvPr id="6" name="Shape 4"/>
-          <p:cNvSpPr/>
-          <p:nvPr/>
-        </p:nvSpPr>
-        <p:spPr>
-          <a:xfrm>
-            <a:off x="7201632" y="2395728"/>
-            <a:ext cx="4423136" cy="3246120"/>
-          </a:xfrm>
-          <a:prstGeom prst="roundRect">
-            <a:avLst>
-              <a:gd name="adj" fmla="val 2535"/>
-            </a:avLst>
-          </a:prstGeom>
-          <a:solidFill>
-            <a:srgbClr val="F8E7EF"/>
-          </a:solidFill>
-          <a:ln/>
-          <a:effectLst>
-            <a:outerShdw sx="100000" sy="100000" kx="0" ky="0" algn="bl" rotWithShape="0" blurRad="88900" dist="25400" dir="5400000">
-              <a:srgbClr val="22303C">
-                <a:alpha val="12000"/>
-              </a:srgbClr>
-            </a:outerShdw>
-          </a:effectLst>
-        </p:spPr>
-      </p:sp>
-      <p:sp>
-        <p:nvSpPr>
-          <p:cNvPr id="7" name="Text 5"/>
-          <p:cNvSpPr/>
-          <p:nvPr/>
-        </p:nvSpPr>
-        <p:spPr>
-          <a:xfrm>
-            <a:off x="7439376" y="2578608"/>
-            <a:ext cx="3965936" cy="457200"/>
-          </a:xfrm>
-          <a:prstGeom prst="rect">
-            <a:avLst/>
-          </a:prstGeom>
-          <a:noFill/>
-          <a:ln/>
-        </p:spPr>
-        <p:txBody>
-          <a:bodyPr wrap="square" lIns="0" tIns="0" rIns="0" bIns="0" rtlCol="0" anchor="ctr"/>
-          <a:lstStyle/>
-          <a:p>
-            <a:pPr indent="0" marL="0">
-              <a:buNone/>
-            </a:pPr>
-            <a:r>
-              <a:rPr lang="en-US" sz="1500" b="1" dirty="0">
-                <a:solidFill>
-                  <a:srgbClr val="AD1457"/>
-                </a:solidFill>
-                <a:latin typeface="Calibri" pitchFamily="34" charset="0"/>
-                <a:ea typeface="Calibri" pitchFamily="34" charset="-122"/>
-                <a:cs typeface="Calibri" pitchFamily="34" charset="-120"/>
-              </a:rPr>
-              <a:t>ANSWER  </a:t>
-            </a:r>
-            <a:pPr indent="0" marL="0">
-              <a:buNone/>
-            </a:pPr>
-            <a:r>
-              <a:rPr lang="en-US" sz="1500" b="1" dirty="0">
-                <a:solidFill>
-                  <a:srgbClr val="1B2A38"/>
-                </a:solidFill>
-                <a:latin typeface="Calibri" pitchFamily="34" charset="0"/>
-                <a:ea typeface="Calibri" pitchFamily="34" charset="-122"/>
-                <a:cs typeface="Calibri" pitchFamily="34" charset="-120"/>
-              </a:rPr>
-              <a:t>C — HLA alloimmunization</a:t>
-            </a:r>
-            <a:endParaRPr lang="en-US" sz="1500" dirty="0"/>
-          </a:p>
-        </p:txBody>
-      </p:sp>
-      <p:sp>
-        <p:nvSpPr>
-          <p:cNvPr id="8" name="Text 6"/>
-          <p:cNvSpPr/>
-          <p:nvPr/>
-        </p:nvSpPr>
-        <p:spPr>
-          <a:xfrm>
-            <a:off x="7439376" y="3127248"/>
-            <a:ext cx="3947648" cy="2377440"/>
-          </a:xfrm>
-          <a:prstGeom prst="rect">
-            <a:avLst/>
-          </a:prstGeom>
-          <a:noFill/>
-          <a:ln/>
-        </p:spPr>
-        <p:txBody>
-          <a:bodyPr wrap="square" lIns="0" tIns="0" rIns="0" bIns="0" rtlCol="0" anchor="t"/>
-          <a:lstStyle/>
-          <a:p>
-            <a:pPr algn="l" indent="0" marL="0">
-              <a:lnSpc>
-                <a:spcPct val="108000"/>
-              </a:lnSpc>
-              <a:buNone/>
-            </a:pPr>
-            <a:r>
-              <a:rPr lang="en-US" sz="1250" dirty="0">
-                <a:solidFill>
-                  <a:srgbClr val="33444F"/>
-                </a:solidFill>
-                <a:latin typeface="Calibri" pitchFamily="34" charset="0"/>
-                <a:ea typeface="Calibri" pitchFamily="34" charset="-122"/>
-                <a:cs typeface="Calibri" pitchFamily="34" charset="-120"/>
-              </a:rPr>
-              <a:t>A poor immediate (10–60 min) corrected count increment suggests immune (HLA/HPA) refractoriness → HLA-matched platelets. Non-immune causes (fever, sepsis, splenomegaly, DIC) typically show a poor 1-hour CCI.</a:t>
-            </a:r>
-            <a:endParaRPr lang="en-US" sz="1250" dirty="0"/>
           </a:p>
         </p:txBody>
       </p:sp>
@@ -12696,6 +12336,10 @@
           </a:solidFill>
           <a:ln/>
         </p:spPr>
+        <p:txBody>
+          <a:bodyPr/>
+          <a:p/>
+        </p:txBody>
       </p:sp>
       <p:sp>
         <p:nvSpPr>
@@ -12723,6 +12367,10 @@
             </a:outerShdw>
           </a:effectLst>
         </p:spPr>
+        <p:txBody>
+          <a:bodyPr/>
+          <a:p/>
+        </p:txBody>
       </p:sp>
       <p:sp>
         <p:nvSpPr>
@@ -12823,6 +12471,10 @@
           </a:solidFill>
           <a:ln/>
         </p:spPr>
+        <p:txBody>
+          <a:bodyPr/>
+          <a:p/>
+        </p:txBody>
       </p:sp>
       <p:sp>
         <p:nvSpPr>
@@ -12850,6 +12502,10 @@
             </a:outerShdw>
           </a:effectLst>
         </p:spPr>
+        <p:txBody>
+          <a:bodyPr/>
+          <a:p/>
+        </p:txBody>
       </p:sp>
       <p:sp>
         <p:nvSpPr>
@@ -12950,6 +12606,10 @@
           </a:solidFill>
           <a:ln/>
         </p:spPr>
+        <p:txBody>
+          <a:bodyPr/>
+          <a:p/>
+        </p:txBody>
       </p:sp>
       <p:sp>
         <p:nvSpPr>
@@ -12977,6 +12637,10 @@
             </a:outerShdw>
           </a:effectLst>
         </p:spPr>
+        <p:txBody>
+          <a:bodyPr/>
+          <a:p/>
+        </p:txBody>
       </p:sp>
       <p:sp>
         <p:nvSpPr>
@@ -13077,6 +12741,10 @@
           </a:solidFill>
           <a:ln/>
         </p:spPr>
+        <p:txBody>
+          <a:bodyPr/>
+          <a:p/>
+        </p:txBody>
       </p:sp>
       <p:sp>
         <p:nvSpPr>
@@ -13104,6 +12772,10 @@
             </a:outerShdw>
           </a:effectLst>
         </p:spPr>
+        <p:txBody>
+          <a:bodyPr/>
+          <a:p/>
+        </p:txBody>
       </p:sp>
       <p:sp>
         <p:nvSpPr>
@@ -13204,6 +12876,10 @@
           </a:solidFill>
           <a:ln/>
         </p:spPr>
+        <p:txBody>
+          <a:bodyPr/>
+          <a:p/>
+        </p:txBody>
       </p:sp>
       <p:sp>
         <p:nvSpPr>
@@ -13231,6 +12907,10 @@
             </a:outerShdw>
           </a:effectLst>
         </p:spPr>
+        <p:txBody>
+          <a:bodyPr/>
+          <a:p/>
+        </p:txBody>
       </p:sp>
       <p:sp>
         <p:nvSpPr>
@@ -13526,6 +13206,10 @@
             </a:outerShdw>
           </a:effectLst>
         </p:spPr>
+        <p:txBody>
+          <a:bodyPr/>
+          <a:p/>
+        </p:txBody>
       </p:sp>
       <p:sp>
         <p:nvSpPr>
@@ -13553,6 +13237,10 @@
             </a:outerShdw>
           </a:effectLst>
         </p:spPr>
+        <p:txBody>
+          <a:bodyPr/>
+          <a:p/>
+        </p:txBody>
       </p:sp>
       <p:sp>
         <p:nvSpPr>
@@ -13660,6 +13348,10 @@
             </a:outerShdw>
           </a:effectLst>
         </p:spPr>
+        <p:txBody>
+          <a:bodyPr/>
+          <a:p/>
+        </p:txBody>
       </p:sp>
       <p:sp>
         <p:nvSpPr>
@@ -13687,6 +13379,10 @@
             </a:outerShdw>
           </a:effectLst>
         </p:spPr>
+        <p:txBody>
+          <a:bodyPr/>
+          <a:p/>
+        </p:txBody>
       </p:sp>
       <p:sp>
         <p:nvSpPr>
@@ -13794,6 +13490,10 @@
             </a:outerShdw>
           </a:effectLst>
         </p:spPr>
+        <p:txBody>
+          <a:bodyPr/>
+          <a:p/>
+        </p:txBody>
       </p:sp>
       <p:sp>
         <p:nvSpPr>
@@ -13821,6 +13521,10 @@
             </a:outerShdw>
           </a:effectLst>
         </p:spPr>
+        <p:txBody>
+          <a:bodyPr/>
+          <a:p/>
+        </p:txBody>
       </p:sp>
       <p:sp>
         <p:nvSpPr>
@@ -13928,6 +13632,10 @@
             </a:outerShdw>
           </a:effectLst>
         </p:spPr>
+        <p:txBody>
+          <a:bodyPr/>
+          <a:p/>
+        </p:txBody>
       </p:sp>
       <p:sp>
         <p:nvSpPr>
@@ -13955,6 +13663,10 @@
             </a:outerShdw>
           </a:effectLst>
         </p:spPr>
+        <p:txBody>
+          <a:bodyPr/>
+          <a:p/>
+        </p:txBody>
       </p:sp>
       <p:sp>
         <p:nvSpPr>
@@ -14062,6 +13774,10 @@
             </a:outerShdw>
           </a:effectLst>
         </p:spPr>
+        <p:txBody>
+          <a:bodyPr/>
+          <a:p/>
+        </p:txBody>
       </p:sp>
       <p:sp>
         <p:nvSpPr>
@@ -14089,6 +13805,10 @@
             </a:outerShdw>
           </a:effectLst>
         </p:spPr>
+        <p:txBody>
+          <a:bodyPr/>
+          <a:p/>
+        </p:txBody>
       </p:sp>
       <p:sp>
         <p:nvSpPr>
@@ -14196,6 +13916,10 @@
             </a:outerShdw>
           </a:effectLst>
         </p:spPr>
+        <p:txBody>
+          <a:bodyPr/>
+          <a:p/>
+        </p:txBody>
       </p:sp>
       <p:sp>
         <p:nvSpPr>
@@ -14223,6 +13947,10 @@
             </a:outerShdw>
           </a:effectLst>
         </p:spPr>
+        <p:txBody>
+          <a:bodyPr/>
+          <a:p/>
+        </p:txBody>
       </p:sp>
       <p:sp>
         <p:nvSpPr>
@@ -14734,6 +14462,1982 @@
 </p:sld>
 </file>
 
+<file path=ppt/slides/slide31.xml><?xml version="1.0" encoding="utf-8"?>
+<p:sld xmlns:a="http://schemas.openxmlformats.org/drawingml/2006/main" xmlns:p="http://schemas.openxmlformats.org/presentationml/2006/main" xmlns:r="http://schemas.openxmlformats.org/officeDocument/2006/relationships">
+  <p:cSld>
+    <p:spTree>
+      <p:nvGrpSpPr>
+        <p:cNvPr id="1" name=""/>
+        <p:cNvGrpSpPr/>
+        <p:nvPr/>
+      </p:nvGrpSpPr>
+      <p:grpSpPr/>
+      <p:sp>
+        <p:nvSpPr>
+          <p:cNvPr id="2" name="Text 0"/>
+          <p:cNvSpPr/>
+          <p:nvPr/>
+        </p:nvSpPr>
+        <p:spPr>
+          <a:xfrm>
+            <a:off x="566928" y="329184"/>
+            <a:ext cx="10515600" cy="310896"/>
+          </a:xfrm>
+          <a:prstGeom prst="rect">
+            <a:avLst/>
+          </a:prstGeom>
+          <a:noFill/>
+          <a:ln/>
+        </p:spPr>
+        <p:txBody>
+          <a:bodyPr wrap="square" lIns="0" tIns="0" rIns="0" bIns="0" rtlCol="0" anchor="ctr"/>
+          <a:lstStyle/>
+          <a:p>
+            <a:pPr algn="l" indent="0" marL="0">
+              <a:buNone/>
+            </a:pPr>
+            <a:r>
+              <a:rPr lang="en-US" sz="1100" b="1" spc="150" kern="0" dirty="0">
+                <a:solidFill>
+                  <a:srgbClr val="AD1457"/>
+                </a:solidFill>
+                <a:latin typeface="Calibri" pitchFamily="34" charset="0"/>
+                <a:ea typeface="Calibri" pitchFamily="34" charset="-122"/>
+                <a:cs typeface="Calibri" pitchFamily="34" charset="-120"/>
+              </a:rPr>
+              <a:t>TRANSFUSION MEDICINE   ·   BOARD REVIEW  ·  Q4</a:t>
+            </a:r>
+            <a:endParaRPr lang="en-US" sz="1100" dirty="0"/>
+          </a:p>
+        </p:txBody>
+      </p:sp>
+      <p:sp>
+        <p:nvSpPr>
+          <p:cNvPr id="3" name="Text 1"/>
+          <p:cNvSpPr/>
+          <p:nvPr/>
+        </p:nvSpPr>
+        <p:spPr>
+          <a:xfrm>
+            <a:off x="566928" y="713232"/>
+            <a:ext cx="11064240" cy="749808"/>
+          </a:xfrm>
+          <a:prstGeom prst="rect">
+            <a:avLst/>
+          </a:prstGeom>
+          <a:noFill/>
+          <a:ln/>
+        </p:spPr>
+        <p:txBody>
+          <a:bodyPr wrap="square" lIns="0" tIns="0" rIns="0" bIns="0" rtlCol="0" anchor="ctr"/>
+          <a:lstStyle/>
+          <a:p>
+            <a:pPr algn="l" indent="0" marL="0">
+              <a:buNone/>
+            </a:pPr>
+            <a:r>
+              <a:rPr lang="en-US" sz="2600" b="1" dirty="0">
+                <a:solidFill>
+                  <a:srgbClr val="0E3A5F"/>
+                </a:solidFill>
+                <a:latin typeface="Calibri" pitchFamily="34" charset="0"/>
+                <a:ea typeface="Calibri" pitchFamily="34" charset="-122"/>
+                <a:cs typeface="Calibri" pitchFamily="34" charset="-120"/>
+              </a:rPr>
+              <a:t>Board-Style Review</a:t>
+            </a:r>
+            <a:endParaRPr lang="en-US" sz="2600" dirty="0"/>
+          </a:p>
+        </p:txBody>
+      </p:sp>
+      <p:sp>
+        <p:nvSpPr>
+          <p:cNvPr id="4" name="Text 2"/>
+          <p:cNvSpPr/>
+          <p:nvPr/>
+        </p:nvSpPr>
+        <p:spPr>
+          <a:xfrm>
+            <a:off x="566928" y="1417320"/>
+            <a:ext cx="11057839" cy="914400"/>
+          </a:xfrm>
+          <a:prstGeom prst="rect">
+            <a:avLst/>
+          </a:prstGeom>
+          <a:noFill/>
+          <a:ln/>
+        </p:spPr>
+        <p:txBody>
+          <a:bodyPr wrap="square" lIns="0" tIns="0" rIns="0" bIns="0" rtlCol="0" anchor="t"/>
+          <a:lstStyle/>
+          <a:p>
+            <a:pPr algn="l" indent="0" marL="0">
+              <a:lnSpc>
+                <a:spcPct val="105000"/>
+              </a:lnSpc>
+              <a:buNone/>
+            </a:pPr>
+            <a:r>
+              <a:rPr lang="en-US" sz="1450" b="1" dirty="0">
+                <a:solidFill>
+                  <a:srgbClr val="1B2A38"/>
+                </a:solidFill>
+                <a:latin typeface="Calibri" pitchFamily="34" charset="0"/>
+                <a:ea typeface="Calibri" pitchFamily="34" charset="-122"/>
+                <a:cs typeface="Calibri" pitchFamily="34" charset="-120"/>
+              </a:rPr>
+              <a:t>A patient shows a poor platelet increment at 10–60 minutes after several transfusions, with good counts predicted otherwise. Which mechanism is most likely?</a:t>
+            </a:r>
+            <a:endParaRPr lang="en-US" sz="1450" dirty="0"/>
+          </a:p>
+        </p:txBody>
+      </p:sp>
+      <p:sp>
+        <p:nvSpPr>
+          <p:cNvPr id="5" name="Text 3"/>
+          <p:cNvSpPr/>
+          <p:nvPr/>
+        </p:nvSpPr>
+        <p:spPr>
+          <a:xfrm>
+            <a:off x="658368" y="2395728"/>
+            <a:ext cx="6192390" cy="3017520"/>
+          </a:xfrm>
+          <a:prstGeom prst="rect">
+            <a:avLst/>
+          </a:prstGeom>
+          <a:noFill/>
+          <a:ln/>
+        </p:spPr>
+        <p:txBody>
+          <a:bodyPr wrap="square" lIns="0" tIns="0" rIns="0" bIns="0" rtlCol="0" anchor="t"/>
+          <a:lstStyle/>
+          <a:p>
+            <a:pPr algn="l" indent="0" marL="0">
+              <a:spcAft>
+                <a:spcPts val="600"/>
+              </a:spcAft>
+              <a:buNone/>
+            </a:pPr>
+            <a:r>
+              <a:rPr lang="en-US" sz="1350" dirty="0">
+                <a:solidFill>
+                  <a:srgbClr val="33444F"/>
+                </a:solidFill>
+                <a:latin typeface="Calibri" pitchFamily="34" charset="0"/>
+                <a:ea typeface="Calibri" pitchFamily="34" charset="-122"/>
+                <a:cs typeface="Calibri" pitchFamily="34" charset="-120"/>
+              </a:rPr>
+              <a:t>A. Fever and sepsis</a:t>
+            </a:r>
+            <a:endParaRPr lang="en-US" sz="1350" dirty="0"/>
+          </a:p>
+          <a:p>
+            <a:pPr algn="l" indent="0" marL="0">
+              <a:spcAft>
+                <a:spcPts val="600"/>
+              </a:spcAft>
+              <a:buNone/>
+            </a:pPr>
+            <a:r>
+              <a:rPr lang="en-US" sz="1350" dirty="0">
+                <a:solidFill>
+                  <a:srgbClr val="33444F"/>
+                </a:solidFill>
+                <a:latin typeface="Calibri" pitchFamily="34" charset="0"/>
+                <a:ea typeface="Calibri" pitchFamily="34" charset="-122"/>
+                <a:cs typeface="Calibri" pitchFamily="34" charset="-120"/>
+              </a:rPr>
+              <a:t>B. Splenomegaly</a:t>
+            </a:r>
+            <a:endParaRPr lang="en-US" sz="1350" dirty="0"/>
+          </a:p>
+          <a:p>
+            <a:pPr algn="l" indent="0" marL="0">
+              <a:spcAft>
+                <a:spcPts val="600"/>
+              </a:spcAft>
+              <a:buNone/>
+            </a:pPr>
+            <a:r>
+              <a:rPr lang="en-US" sz="1350" b="1" dirty="0">
+                <a:solidFill>
+                  <a:srgbClr val="7A0E3C"/>
+                </a:solidFill>
+                <a:latin typeface="Calibri" pitchFamily="34" charset="0"/>
+                <a:ea typeface="Calibri" pitchFamily="34" charset="-122"/>
+                <a:cs typeface="Calibri" pitchFamily="34" charset="-120"/>
+              </a:rPr>
+              <a:t>C. HLA alloimmunization</a:t>
+            </a:r>
+            <a:endParaRPr lang="en-US" sz="1350" dirty="0"/>
+          </a:p>
+          <a:p>
+            <a:pPr algn="l" indent="0" marL="0">
+              <a:spcAft>
+                <a:spcPts val="600"/>
+              </a:spcAft>
+              <a:buNone/>
+            </a:pPr>
+            <a:r>
+              <a:rPr lang="en-US" sz="1350" dirty="0">
+                <a:solidFill>
+                  <a:srgbClr val="33444F"/>
+                </a:solidFill>
+                <a:latin typeface="Calibri" pitchFamily="34" charset="0"/>
+                <a:ea typeface="Calibri" pitchFamily="34" charset="-122"/>
+                <a:cs typeface="Calibri" pitchFamily="34" charset="-120"/>
+              </a:rPr>
+              <a:t>D. Disseminated intravascular coagulation</a:t>
+            </a:r>
+            <a:endParaRPr lang="en-US" sz="1350" dirty="0"/>
+          </a:p>
+          <a:p>
+            <a:pPr algn="l" indent="0" marL="0">
+              <a:spcAft>
+                <a:spcPts val="600"/>
+              </a:spcAft>
+              <a:buNone/>
+            </a:pPr>
+            <a:r>
+              <a:rPr lang="en-US" sz="1350" dirty="0">
+                <a:solidFill>
+                  <a:srgbClr val="33444F"/>
+                </a:solidFill>
+                <a:latin typeface="Calibri" pitchFamily="34" charset="0"/>
+                <a:ea typeface="Calibri" pitchFamily="34" charset="-122"/>
+                <a:cs typeface="Calibri" pitchFamily="34" charset="-120"/>
+              </a:rPr>
+              <a:t>E. Dilution</a:t>
+            </a:r>
+            <a:endParaRPr lang="en-US" sz="1350" dirty="0"/>
+          </a:p>
+        </p:txBody>
+      </p:sp>
+      <p:sp>
+        <p:nvSpPr>
+          <p:cNvPr id="6" name="Shape 4"/>
+          <p:cNvSpPr/>
+          <p:nvPr/>
+        </p:nvSpPr>
+        <p:spPr>
+          <a:xfrm>
+            <a:off x="7201632" y="2395728"/>
+            <a:ext cx="4423136" cy="3246120"/>
+          </a:xfrm>
+          <a:prstGeom prst="roundRect">
+            <a:avLst>
+              <a:gd name="adj" fmla="val 2535"/>
+            </a:avLst>
+          </a:prstGeom>
+          <a:solidFill>
+            <a:srgbClr val="F8E7EF"/>
+          </a:solidFill>
+          <a:ln/>
+          <a:effectLst>
+            <a:outerShdw sx="100000" sy="100000" kx="0" ky="0" algn="bl" rotWithShape="0" blurRad="88900" dist="25400" dir="5400000">
+              <a:srgbClr val="22303C">
+                <a:alpha val="12000"/>
+              </a:srgbClr>
+            </a:outerShdw>
+          </a:effectLst>
+        </p:spPr>
+        <p:txBody>
+          <a:bodyPr/>
+          <a:p/>
+        </p:txBody>
+      </p:sp>
+      <p:sp>
+        <p:nvSpPr>
+          <p:cNvPr id="7" name="Text 5"/>
+          <p:cNvSpPr/>
+          <p:nvPr/>
+        </p:nvSpPr>
+        <p:spPr>
+          <a:xfrm>
+            <a:off x="7439376" y="2578608"/>
+            <a:ext cx="3965936" cy="457200"/>
+          </a:xfrm>
+          <a:prstGeom prst="rect">
+            <a:avLst/>
+          </a:prstGeom>
+          <a:noFill/>
+          <a:ln/>
+        </p:spPr>
+        <p:txBody>
+          <a:bodyPr wrap="square" lIns="0" tIns="0" rIns="0" bIns="0" rtlCol="0" anchor="ctr"/>
+          <a:lstStyle/>
+          <a:p>
+            <a:pPr indent="0" marL="0">
+              <a:buNone/>
+            </a:pPr>
+            <a:r>
+              <a:rPr lang="en-US" sz="1500" b="1" dirty="0">
+                <a:solidFill>
+                  <a:srgbClr val="AD1457"/>
+                </a:solidFill>
+                <a:latin typeface="Calibri" pitchFamily="34" charset="0"/>
+                <a:ea typeface="Calibri" pitchFamily="34" charset="-122"/>
+                <a:cs typeface="Calibri" pitchFamily="34" charset="-120"/>
+              </a:rPr>
+              <a:t>ANSWER  </a:t>
+            </a:r>
+            <a:pPr indent="0" marL="0">
+              <a:buNone/>
+            </a:pPr>
+            <a:r>
+              <a:rPr lang="en-US" sz="1500" b="1" dirty="0">
+                <a:solidFill>
+                  <a:srgbClr val="1B2A38"/>
+                </a:solidFill>
+                <a:latin typeface="Calibri" pitchFamily="34" charset="0"/>
+                <a:ea typeface="Calibri" pitchFamily="34" charset="-122"/>
+                <a:cs typeface="Calibri" pitchFamily="34" charset="-120"/>
+              </a:rPr>
+              <a:t>C — HLA alloimmunization</a:t>
+            </a:r>
+            <a:endParaRPr lang="en-US" sz="1500" dirty="0"/>
+          </a:p>
+        </p:txBody>
+      </p:sp>
+      <p:sp>
+        <p:nvSpPr>
+          <p:cNvPr id="8" name="Text 6"/>
+          <p:cNvSpPr/>
+          <p:nvPr/>
+        </p:nvSpPr>
+        <p:spPr>
+          <a:xfrm>
+            <a:off x="7439376" y="3127248"/>
+            <a:ext cx="3947648" cy="2377440"/>
+          </a:xfrm>
+          <a:prstGeom prst="rect">
+            <a:avLst/>
+          </a:prstGeom>
+          <a:noFill/>
+          <a:ln/>
+        </p:spPr>
+        <p:txBody>
+          <a:bodyPr wrap="square" lIns="0" tIns="0" rIns="0" bIns="0" rtlCol="0" anchor="t"/>
+          <a:lstStyle/>
+          <a:p>
+            <a:pPr algn="l" indent="0" marL="0">
+              <a:lnSpc>
+                <a:spcPct val="108000"/>
+              </a:lnSpc>
+              <a:buNone/>
+            </a:pPr>
+            <a:r>
+              <a:rPr lang="en-US" sz="1250" dirty="0">
+                <a:solidFill>
+                  <a:srgbClr val="33444F"/>
+                </a:solidFill>
+                <a:latin typeface="Calibri" pitchFamily="34" charset="0"/>
+                <a:ea typeface="Calibri" pitchFamily="34" charset="-122"/>
+                <a:cs typeface="Calibri" pitchFamily="34" charset="-120"/>
+              </a:rPr>
+              <a:t>A poor immediate (10–60 min) corrected count increment suggests immune (HLA/HPA) refractoriness → HLA-matched platelets. Non-immune causes (fever, sepsis, splenomegaly, DIC) typically show a poor 1-hour CCI.</a:t>
+            </a:r>
+            <a:endParaRPr lang="en-US" sz="1250" dirty="0"/>
+          </a:p>
+        </p:txBody>
+      </p:sp>
+      <p:sp>
+        <p:nvSpPr>
+          <p:cNvPr id="9" name="Text 7"/>
+          <p:cNvSpPr/>
+          <p:nvPr/>
+        </p:nvSpPr>
+        <p:spPr>
+          <a:xfrm>
+            <a:off x="566928" y="6473952"/>
+            <a:ext cx="7772400" cy="274320"/>
+          </a:xfrm>
+          <a:prstGeom prst="rect">
+            <a:avLst/>
+          </a:prstGeom>
+          <a:noFill/>
+          <a:ln/>
+        </p:spPr>
+        <p:txBody>
+          <a:bodyPr wrap="square" lIns="0" tIns="0" rIns="0" bIns="0" rtlCol="0" anchor="ctr"/>
+          <a:lstStyle/>
+          <a:p>
+            <a:pPr algn="l" indent="0" marL="0">
+              <a:buNone/>
+            </a:pPr>
+            <a:r>
+              <a:rPr lang="en-US" sz="850" dirty="0">
+                <a:solidFill>
+                  <a:srgbClr val="9AA8B4"/>
+                </a:solidFill>
+                <a:latin typeface="Calibri" pitchFamily="34" charset="0"/>
+                <a:ea typeface="Calibri" pitchFamily="34" charset="-122"/>
+                <a:cs typeface="Calibri" pitchFamily="34" charset="-120"/>
+              </a:rPr>
+              <a:t>Makassed General Hospital  ·  Department of Laboratory Medicine</a:t>
+            </a:r>
+            <a:endParaRPr lang="en-US" sz="850" dirty="0"/>
+          </a:p>
+        </p:txBody>
+      </p:sp>
+      <p:sp>
+        <p:nvSpPr>
+          <p:cNvPr id="10" name="Text 8"/>
+          <p:cNvSpPr/>
+          <p:nvPr/>
+        </p:nvSpPr>
+        <p:spPr>
+          <a:xfrm>
+            <a:off x="9814255" y="6473952"/>
+            <a:ext cx="1828800" cy="274320"/>
+          </a:xfrm>
+          <a:prstGeom prst="rect">
+            <a:avLst/>
+          </a:prstGeom>
+          <a:noFill/>
+          <a:ln/>
+        </p:spPr>
+        <p:txBody>
+          <a:bodyPr wrap="square" lIns="0" tIns="0" rIns="0" bIns="0" rtlCol="0" anchor="ctr"/>
+          <a:lstStyle/>
+          <a:p>
+            <a:pPr algn="r" indent="0" marL="0">
+              <a:buNone/>
+            </a:pPr>
+            <a:r>
+              <a:rPr lang="en-US" sz="850" dirty="0">
+                <a:solidFill>
+                  <a:srgbClr val="9AA8B4"/>
+                </a:solidFill>
+                <a:latin typeface="Calibri" pitchFamily="34" charset="0"/>
+                <a:ea typeface="Calibri" pitchFamily="34" charset="-122"/>
+                <a:cs typeface="Calibri" pitchFamily="34" charset="-120"/>
+              </a:rPr>
+              <a:t>CP Lecture Series</a:t>
+            </a:r>
+            <a:pPr algn="r" indent="0" marL="0">
+              <a:buNone/>
+            </a:pPr>
+            <a:r>
+              <a:rPr lang="en-US" sz="850" dirty="0">
+                <a:solidFill>
+                  <a:srgbClr val="DCE4EC"/>
+                </a:solidFill>
+                <a:latin typeface="Calibri" pitchFamily="34" charset="0"/>
+                <a:ea typeface="Calibri" pitchFamily="34" charset="-122"/>
+                <a:cs typeface="Calibri" pitchFamily="34" charset="-120"/>
+              </a:rPr>
+              <a:t>   ·   </a:t>
+            </a:r>
+            <a:pPr algn="r" indent="0" marL="0">
+              <a:buNone/>
+            </a:pPr>
+            <a:r>
+              <a:rPr lang="en-US" sz="850" b="1" dirty="0">
+                <a:solidFill>
+                  <a:srgbClr val="AD1457"/>
+                </a:solidFill>
+                <a:latin typeface="Calibri" pitchFamily="34" charset="0"/>
+                <a:ea typeface="Calibri" pitchFamily="34" charset="-122"/>
+                <a:cs typeface="Calibri" pitchFamily="34" charset="-120"/>
+              </a:rPr>
+              <a:t>23</a:t>
+            </a:r>
+            <a:endParaRPr lang="en-US" sz="850" dirty="0"/>
+          </a:p>
+        </p:txBody>
+      </p:sp>
+    </p:spTree>
+  </p:cSld>
+  <p:clrMapOvr>
+    <a:masterClrMapping/>
+  </p:clrMapOvr>
+</p:sld>
+</file>
+
+<file path=ppt/slides/slide32.xml><?xml version="1.0" encoding="utf-8"?>
+<p:sld xmlns:a="http://schemas.openxmlformats.org/drawingml/2006/main" xmlns:p="http://schemas.openxmlformats.org/presentationml/2006/main" xmlns:r="http://schemas.openxmlformats.org/officeDocument/2006/relationships">
+  <p:cSld>
+    <p:spTree>
+      <p:nvGrpSpPr>
+        <p:cNvPr id="1" name=""/>
+        <p:cNvGrpSpPr/>
+        <p:nvPr/>
+      </p:nvGrpSpPr>
+      <p:grpSpPr/>
+      <p:sp>
+        <p:nvSpPr>
+          <p:cNvPr id="2" name="Text 0"/>
+          <p:cNvSpPr/>
+          <p:nvPr/>
+        </p:nvSpPr>
+        <p:spPr>
+          <a:xfrm>
+            <a:off x="566928" y="329184"/>
+            <a:ext cx="10515600" cy="310896"/>
+          </a:xfrm>
+          <a:prstGeom prst="rect">
+            <a:avLst/>
+          </a:prstGeom>
+          <a:noFill/>
+          <a:ln/>
+        </p:spPr>
+        <p:txBody>
+          <a:bodyPr wrap="square" lIns="0" tIns="0" rIns="0" bIns="0" rtlCol="0" anchor="ctr"/>
+          <a:lstStyle/>
+          <a:p>
+            <a:pPr algn="l" indent="0" marL="0">
+              <a:buNone/>
+            </a:pPr>
+            <a:r>
+              <a:rPr lang="en-US" sz="1100" b="1" spc="150" kern="0" dirty="0">
+                <a:solidFill>
+                  <a:srgbClr val="AD1457"/>
+                </a:solidFill>
+                <a:latin typeface="Calibri" pitchFamily="34" charset="0"/>
+                <a:ea typeface="Calibri" pitchFamily="34" charset="-122"/>
+                <a:cs typeface="Calibri" pitchFamily="34" charset="-120"/>
+              </a:rPr>
+              <a:t>TRANSFUSION MEDICINE   ·   BOARD REVIEW  ·  Q3</a:t>
+            </a:r>
+            <a:endParaRPr lang="en-US" sz="1100" dirty="0"/>
+          </a:p>
+        </p:txBody>
+      </p:sp>
+      <p:sp>
+        <p:nvSpPr>
+          <p:cNvPr id="3" name="Text 1"/>
+          <p:cNvSpPr/>
+          <p:nvPr/>
+        </p:nvSpPr>
+        <p:spPr>
+          <a:xfrm>
+            <a:off x="566928" y="713232"/>
+            <a:ext cx="11064240" cy="749808"/>
+          </a:xfrm>
+          <a:prstGeom prst="rect">
+            <a:avLst/>
+          </a:prstGeom>
+          <a:noFill/>
+          <a:ln/>
+        </p:spPr>
+        <p:txBody>
+          <a:bodyPr wrap="square" lIns="0" tIns="0" rIns="0" bIns="0" rtlCol="0" anchor="ctr"/>
+          <a:lstStyle/>
+          <a:p>
+            <a:pPr algn="l" indent="0" marL="0">
+              <a:buNone/>
+            </a:pPr>
+            <a:r>
+              <a:rPr lang="en-US" sz="2600" b="1" dirty="0">
+                <a:solidFill>
+                  <a:srgbClr val="0E3A5F"/>
+                </a:solidFill>
+                <a:latin typeface="Calibri" pitchFamily="34" charset="0"/>
+                <a:ea typeface="Calibri" pitchFamily="34" charset="-122"/>
+                <a:cs typeface="Calibri" pitchFamily="34" charset="-120"/>
+              </a:rPr>
+              <a:t>Board-Style Review</a:t>
+            </a:r>
+            <a:endParaRPr lang="en-US" sz="2600" dirty="0"/>
+          </a:p>
+        </p:txBody>
+      </p:sp>
+      <p:sp>
+        <p:nvSpPr>
+          <p:cNvPr id="4" name="Text 2"/>
+          <p:cNvSpPr/>
+          <p:nvPr/>
+        </p:nvSpPr>
+        <p:spPr>
+          <a:xfrm>
+            <a:off x="566928" y="1417320"/>
+            <a:ext cx="11057839" cy="914400"/>
+          </a:xfrm>
+          <a:prstGeom prst="rect">
+            <a:avLst/>
+          </a:prstGeom>
+          <a:noFill/>
+          <a:ln/>
+        </p:spPr>
+        <p:txBody>
+          <a:bodyPr wrap="square" lIns="0" tIns="0" rIns="0" bIns="0" rtlCol="0" anchor="t"/>
+          <a:lstStyle/>
+          <a:p>
+            <a:pPr algn="l" indent="0" marL="0">
+              <a:lnSpc>
+                <a:spcPct val="105000"/>
+              </a:lnSpc>
+              <a:buNone/>
+            </a:pPr>
+            <a:r>
+              <a:rPr lang="en-US" sz="1450" b="1" dirty="0">
+                <a:solidFill>
+                  <a:srgbClr val="1B2A38"/>
+                </a:solidFill>
+                <a:latin typeface="Calibri" pitchFamily="34" charset="0"/>
+                <a:ea typeface="Calibri" pitchFamily="34" charset="-122"/>
+                <a:cs typeface="Calibri" pitchFamily="34" charset="-120"/>
+              </a:rPr>
+              <a:t>During a massive transfusion, a patient develops tetany, hypotension, and a prolonged QT. Which is the best immediate test and treatment?</a:t>
+            </a:r>
+            <a:endParaRPr lang="en-US" sz="1450" dirty="0"/>
+          </a:p>
+        </p:txBody>
+      </p:sp>
+      <p:sp>
+        <p:nvSpPr>
+          <p:cNvPr id="5" name="Text 3"/>
+          <p:cNvSpPr/>
+          <p:nvPr/>
+        </p:nvSpPr>
+        <p:spPr>
+          <a:xfrm>
+            <a:off x="658368" y="2395728"/>
+            <a:ext cx="6192390" cy="3017520"/>
+          </a:xfrm>
+          <a:prstGeom prst="rect">
+            <a:avLst/>
+          </a:prstGeom>
+          <a:noFill/>
+          <a:ln/>
+        </p:spPr>
+        <p:txBody>
+          <a:bodyPr wrap="square" lIns="0" tIns="0" rIns="0" bIns="0" rtlCol="0" anchor="t"/>
+          <a:lstStyle/>
+          <a:p>
+            <a:pPr algn="l" indent="0" marL="0">
+              <a:spcAft>
+                <a:spcPts val="600"/>
+              </a:spcAft>
+              <a:buNone/>
+            </a:pPr>
+            <a:r>
+              <a:rPr lang="en-US" sz="1350" dirty="0">
+                <a:solidFill>
+                  <a:srgbClr val="33444F"/>
+                </a:solidFill>
+                <a:latin typeface="Calibri" pitchFamily="34" charset="0"/>
+                <a:ea typeface="Calibri" pitchFamily="34" charset="-122"/>
+                <a:cs typeface="Calibri" pitchFamily="34" charset="-120"/>
+              </a:rPr>
+              <a:t>A. Total calcium; give potassium</a:t>
+            </a:r>
+            <a:endParaRPr lang="en-US" sz="1350" dirty="0"/>
+          </a:p>
+          <a:p>
+            <a:pPr algn="l" indent="0" marL="0">
+              <a:spcAft>
+                <a:spcPts val="600"/>
+              </a:spcAft>
+              <a:buNone/>
+            </a:pPr>
+            <a:r>
+              <a:rPr lang="en-US" sz="1350" b="1" dirty="0">
+                <a:solidFill>
+                  <a:srgbClr val="7A0E3C"/>
+                </a:solidFill>
+                <a:latin typeface="Calibri" pitchFamily="34" charset="0"/>
+                <a:ea typeface="Calibri" pitchFamily="34" charset="-122"/>
+                <a:cs typeface="Calibri" pitchFamily="34" charset="-120"/>
+              </a:rPr>
+              <a:t>B. Ionized calcium; give calcium</a:t>
+            </a:r>
+            <a:endParaRPr lang="en-US" sz="1350" dirty="0"/>
+          </a:p>
+          <a:p>
+            <a:pPr algn="l" indent="0" marL="0">
+              <a:spcAft>
+                <a:spcPts val="600"/>
+              </a:spcAft>
+              <a:buNone/>
+            </a:pPr>
+            <a:r>
+              <a:rPr lang="en-US" sz="1350" dirty="0">
+                <a:solidFill>
+                  <a:srgbClr val="33444F"/>
+                </a:solidFill>
+                <a:latin typeface="Calibri" pitchFamily="34" charset="0"/>
+                <a:ea typeface="Calibri" pitchFamily="34" charset="-122"/>
+                <a:cs typeface="Calibri" pitchFamily="34" charset="-120"/>
+              </a:rPr>
+              <a:t>C. Magnesium; give magnesium only</a:t>
+            </a:r>
+            <a:endParaRPr lang="en-US" sz="1350" dirty="0"/>
+          </a:p>
+          <a:p>
+            <a:pPr algn="l" indent="0" marL="0">
+              <a:spcAft>
+                <a:spcPts val="600"/>
+              </a:spcAft>
+              <a:buNone/>
+            </a:pPr>
+            <a:r>
+              <a:rPr lang="en-US" sz="1350" dirty="0">
+                <a:solidFill>
+                  <a:srgbClr val="33444F"/>
+                </a:solidFill>
+                <a:latin typeface="Calibri" pitchFamily="34" charset="0"/>
+                <a:ea typeface="Calibri" pitchFamily="34" charset="-122"/>
+                <a:cs typeface="Calibri" pitchFamily="34" charset="-120"/>
+              </a:rPr>
+              <a:t>D. Lactate; give bicarbonate</a:t>
+            </a:r>
+            <a:endParaRPr lang="en-US" sz="1350" dirty="0"/>
+          </a:p>
+          <a:p>
+            <a:pPr algn="l" indent="0" marL="0">
+              <a:spcAft>
+                <a:spcPts val="600"/>
+              </a:spcAft>
+              <a:buNone/>
+            </a:pPr>
+            <a:r>
+              <a:rPr lang="en-US" sz="1350" dirty="0">
+                <a:solidFill>
+                  <a:srgbClr val="33444F"/>
+                </a:solidFill>
+                <a:latin typeface="Calibri" pitchFamily="34" charset="0"/>
+                <a:ea typeface="Calibri" pitchFamily="34" charset="-122"/>
+                <a:cs typeface="Calibri" pitchFamily="34" charset="-120"/>
+              </a:rPr>
+              <a:t>E. No action needed</a:t>
+            </a:r>
+            <a:endParaRPr lang="en-US" sz="1350" dirty="0"/>
+          </a:p>
+        </p:txBody>
+      </p:sp>
+      <p:sp>
+        <p:nvSpPr>
+          <p:cNvPr id="6" name="Shape 4"/>
+          <p:cNvSpPr/>
+          <p:nvPr/>
+        </p:nvSpPr>
+        <p:spPr>
+          <a:xfrm>
+            <a:off x="7201632" y="2395728"/>
+            <a:ext cx="4423136" cy="3246120"/>
+          </a:xfrm>
+          <a:prstGeom prst="roundRect">
+            <a:avLst>
+              <a:gd name="adj" fmla="val 2535"/>
+            </a:avLst>
+          </a:prstGeom>
+          <a:solidFill>
+            <a:srgbClr val="F8E7EF"/>
+          </a:solidFill>
+          <a:ln/>
+          <a:effectLst>
+            <a:outerShdw sx="100000" sy="100000" kx="0" ky="0" algn="bl" rotWithShape="0" blurRad="88900" dist="25400" dir="5400000">
+              <a:srgbClr val="22303C">
+                <a:alpha val="12000"/>
+              </a:srgbClr>
+            </a:outerShdw>
+          </a:effectLst>
+        </p:spPr>
+        <p:txBody>
+          <a:bodyPr/>
+          <a:p/>
+        </p:txBody>
+      </p:sp>
+      <p:sp>
+        <p:nvSpPr>
+          <p:cNvPr id="7" name="Text 5"/>
+          <p:cNvSpPr/>
+          <p:nvPr/>
+        </p:nvSpPr>
+        <p:spPr>
+          <a:xfrm>
+            <a:off x="7439376" y="2578608"/>
+            <a:ext cx="3965936" cy="457200"/>
+          </a:xfrm>
+          <a:prstGeom prst="rect">
+            <a:avLst/>
+          </a:prstGeom>
+          <a:noFill/>
+          <a:ln/>
+        </p:spPr>
+        <p:txBody>
+          <a:bodyPr wrap="square" lIns="0" tIns="0" rIns="0" bIns="0" rtlCol="0" anchor="ctr"/>
+          <a:lstStyle/>
+          <a:p>
+            <a:pPr indent="0" marL="0">
+              <a:buNone/>
+            </a:pPr>
+            <a:r>
+              <a:rPr lang="en-US" sz="1500" b="1" dirty="0">
+                <a:solidFill>
+                  <a:srgbClr val="AD1457"/>
+                </a:solidFill>
+                <a:latin typeface="Calibri" pitchFamily="34" charset="0"/>
+                <a:ea typeface="Calibri" pitchFamily="34" charset="-122"/>
+                <a:cs typeface="Calibri" pitchFamily="34" charset="-120"/>
+              </a:rPr>
+              <a:t>ANSWER  </a:t>
+            </a:r>
+            <a:pPr indent="0" marL="0">
+              <a:buNone/>
+            </a:pPr>
+            <a:r>
+              <a:rPr lang="en-US" sz="1500" b="1" dirty="0">
+                <a:solidFill>
+                  <a:srgbClr val="1B2A38"/>
+                </a:solidFill>
+                <a:latin typeface="Calibri" pitchFamily="34" charset="0"/>
+                <a:ea typeface="Calibri" pitchFamily="34" charset="-122"/>
+                <a:cs typeface="Calibri" pitchFamily="34" charset="-120"/>
+              </a:rPr>
+              <a:t>B — Ionized calcium; replace calcium</a:t>
+            </a:r>
+            <a:endParaRPr lang="en-US" sz="1500" dirty="0"/>
+          </a:p>
+        </p:txBody>
+      </p:sp>
+      <p:sp>
+        <p:nvSpPr>
+          <p:cNvPr id="8" name="Text 6"/>
+          <p:cNvSpPr/>
+          <p:nvPr/>
+        </p:nvSpPr>
+        <p:spPr>
+          <a:xfrm>
+            <a:off x="7439376" y="3127248"/>
+            <a:ext cx="3947648" cy="2377440"/>
+          </a:xfrm>
+          <a:prstGeom prst="rect">
+            <a:avLst/>
+          </a:prstGeom>
+          <a:noFill/>
+          <a:ln/>
+        </p:spPr>
+        <p:txBody>
+          <a:bodyPr wrap="square" lIns="0" tIns="0" rIns="0" bIns="0" rtlCol="0" anchor="t"/>
+          <a:lstStyle/>
+          <a:p>
+            <a:pPr algn="l" indent="0" marL="0">
+              <a:lnSpc>
+                <a:spcPct val="108000"/>
+              </a:lnSpc>
+              <a:buNone/>
+            </a:pPr>
+            <a:r>
+              <a:rPr lang="en-US" sz="1250" dirty="0">
+                <a:solidFill>
+                  <a:srgbClr val="33444F"/>
+                </a:solidFill>
+                <a:latin typeface="Calibri" pitchFamily="34" charset="0"/>
+                <a:ea typeface="Calibri" pitchFamily="34" charset="-122"/>
+                <a:cs typeface="Calibri" pitchFamily="34" charset="-120"/>
+              </a:rPr>
+              <a:t>Citrate chelates ionized calcium. Measure ionized (not total) calcium and replace it. Hypothermia and hyperkalemia should also be monitored during massive transfusion.</a:t>
+            </a:r>
+            <a:endParaRPr lang="en-US" sz="1250" dirty="0"/>
+          </a:p>
+        </p:txBody>
+      </p:sp>
+      <p:sp>
+        <p:nvSpPr>
+          <p:cNvPr id="9" name="Text 7"/>
+          <p:cNvSpPr/>
+          <p:nvPr/>
+        </p:nvSpPr>
+        <p:spPr>
+          <a:xfrm>
+            <a:off x="566928" y="6473952"/>
+            <a:ext cx="7772400" cy="274320"/>
+          </a:xfrm>
+          <a:prstGeom prst="rect">
+            <a:avLst/>
+          </a:prstGeom>
+          <a:noFill/>
+          <a:ln/>
+        </p:spPr>
+        <p:txBody>
+          <a:bodyPr wrap="square" lIns="0" tIns="0" rIns="0" bIns="0" rtlCol="0" anchor="ctr"/>
+          <a:lstStyle/>
+          <a:p>
+            <a:pPr algn="l" indent="0" marL="0">
+              <a:buNone/>
+            </a:pPr>
+            <a:r>
+              <a:rPr lang="en-US" sz="850" dirty="0">
+                <a:solidFill>
+                  <a:srgbClr val="9AA8B4"/>
+                </a:solidFill>
+                <a:latin typeface="Calibri" pitchFamily="34" charset="0"/>
+                <a:ea typeface="Calibri" pitchFamily="34" charset="-122"/>
+                <a:cs typeface="Calibri" pitchFamily="34" charset="-120"/>
+              </a:rPr>
+              <a:t>Makassed General Hospital  ·  Department of Laboratory Medicine</a:t>
+            </a:r>
+            <a:endParaRPr lang="en-US" sz="850" dirty="0"/>
+          </a:p>
+        </p:txBody>
+      </p:sp>
+      <p:sp>
+        <p:nvSpPr>
+          <p:cNvPr id="10" name="Text 8"/>
+          <p:cNvSpPr/>
+          <p:nvPr/>
+        </p:nvSpPr>
+        <p:spPr>
+          <a:xfrm>
+            <a:off x="9814255" y="6473952"/>
+            <a:ext cx="1828800" cy="274320"/>
+          </a:xfrm>
+          <a:prstGeom prst="rect">
+            <a:avLst/>
+          </a:prstGeom>
+          <a:noFill/>
+          <a:ln/>
+        </p:spPr>
+        <p:txBody>
+          <a:bodyPr wrap="square" lIns="0" tIns="0" rIns="0" bIns="0" rtlCol="0" anchor="ctr"/>
+          <a:lstStyle/>
+          <a:p>
+            <a:pPr algn="r" indent="0" marL="0">
+              <a:buNone/>
+            </a:pPr>
+            <a:r>
+              <a:rPr lang="en-US" sz="850" dirty="0">
+                <a:solidFill>
+                  <a:srgbClr val="9AA8B4"/>
+                </a:solidFill>
+                <a:latin typeface="Calibri" pitchFamily="34" charset="0"/>
+                <a:ea typeface="Calibri" pitchFamily="34" charset="-122"/>
+                <a:cs typeface="Calibri" pitchFamily="34" charset="-120"/>
+              </a:rPr>
+              <a:t>CP Lecture Series</a:t>
+            </a:r>
+            <a:pPr algn="r" indent="0" marL="0">
+              <a:buNone/>
+            </a:pPr>
+            <a:r>
+              <a:rPr lang="en-US" sz="850" dirty="0">
+                <a:solidFill>
+                  <a:srgbClr val="DCE4EC"/>
+                </a:solidFill>
+                <a:latin typeface="Calibri" pitchFamily="34" charset="0"/>
+                <a:ea typeface="Calibri" pitchFamily="34" charset="-122"/>
+                <a:cs typeface="Calibri" pitchFamily="34" charset="-120"/>
+              </a:rPr>
+              <a:t>   ·   </a:t>
+            </a:r>
+            <a:pPr algn="r" indent="0" marL="0">
+              <a:buNone/>
+            </a:pPr>
+            <a:r>
+              <a:rPr lang="en-US" sz="850" b="1" dirty="0">
+                <a:solidFill>
+                  <a:srgbClr val="AD1457"/>
+                </a:solidFill>
+                <a:latin typeface="Calibri" pitchFamily="34" charset="0"/>
+                <a:ea typeface="Calibri" pitchFamily="34" charset="-122"/>
+                <a:cs typeface="Calibri" pitchFamily="34" charset="-120"/>
+              </a:rPr>
+              <a:t>22</a:t>
+            </a:r>
+            <a:endParaRPr lang="en-US" sz="850" dirty="0"/>
+          </a:p>
+        </p:txBody>
+      </p:sp>
+    </p:spTree>
+  </p:cSld>
+  <p:clrMapOvr>
+    <a:masterClrMapping/>
+  </p:clrMapOvr>
+</p:sld>
+</file>
+
+<file path=ppt/slides/slide33.xml><?xml version="1.0" encoding="utf-8"?>
+<p:sld xmlns:a="http://schemas.openxmlformats.org/drawingml/2006/main" xmlns:p="http://schemas.openxmlformats.org/presentationml/2006/main" xmlns:r="http://schemas.openxmlformats.org/officeDocument/2006/relationships">
+  <p:cSld>
+    <p:spTree>
+      <p:nvGrpSpPr>
+        <p:cNvPr id="1" name=""/>
+        <p:cNvGrpSpPr/>
+        <p:nvPr/>
+      </p:nvGrpSpPr>
+      <p:grpSpPr/>
+      <p:sp>
+        <p:nvSpPr>
+          <p:cNvPr id="2" name="Text 0"/>
+          <p:cNvSpPr/>
+          <p:nvPr/>
+        </p:nvSpPr>
+        <p:spPr>
+          <a:xfrm>
+            <a:off x="566928" y="329184"/>
+            <a:ext cx="10515600" cy="310896"/>
+          </a:xfrm>
+          <a:prstGeom prst="rect">
+            <a:avLst/>
+          </a:prstGeom>
+          <a:noFill/>
+          <a:ln/>
+        </p:spPr>
+        <p:txBody>
+          <a:bodyPr wrap="square" lIns="0" tIns="0" rIns="0" bIns="0" rtlCol="0" anchor="ctr"/>
+          <a:lstStyle/>
+          <a:p>
+            <a:pPr algn="l" indent="0" marL="0">
+              <a:buNone/>
+            </a:pPr>
+            <a:r>
+              <a:rPr lang="en-US" sz="1100" b="1" spc="150" kern="0" dirty="0">
+                <a:solidFill>
+                  <a:srgbClr val="AD1457"/>
+                </a:solidFill>
+                <a:latin typeface="Calibri" pitchFamily="34" charset="0"/>
+                <a:ea typeface="Calibri" pitchFamily="34" charset="-122"/>
+                <a:cs typeface="Calibri" pitchFamily="34" charset="-120"/>
+              </a:rPr>
+              <a:t>TRANSFUSION MEDICINE   ·   BOARD REVIEW  ·  Q2</a:t>
+            </a:r>
+            <a:endParaRPr lang="en-US" sz="1100" dirty="0"/>
+          </a:p>
+        </p:txBody>
+      </p:sp>
+      <p:sp>
+        <p:nvSpPr>
+          <p:cNvPr id="3" name="Text 1"/>
+          <p:cNvSpPr/>
+          <p:nvPr/>
+        </p:nvSpPr>
+        <p:spPr>
+          <a:xfrm>
+            <a:off x="566928" y="713232"/>
+            <a:ext cx="11064240" cy="749808"/>
+          </a:xfrm>
+          <a:prstGeom prst="rect">
+            <a:avLst/>
+          </a:prstGeom>
+          <a:noFill/>
+          <a:ln/>
+        </p:spPr>
+        <p:txBody>
+          <a:bodyPr wrap="square" lIns="0" tIns="0" rIns="0" bIns="0" rtlCol="0" anchor="ctr"/>
+          <a:lstStyle/>
+          <a:p>
+            <a:pPr algn="l" indent="0" marL="0">
+              <a:buNone/>
+            </a:pPr>
+            <a:r>
+              <a:rPr lang="en-US" sz="2600" b="1" dirty="0">
+                <a:solidFill>
+                  <a:srgbClr val="0E3A5F"/>
+                </a:solidFill>
+                <a:latin typeface="Calibri" pitchFamily="34" charset="0"/>
+                <a:ea typeface="Calibri" pitchFamily="34" charset="-122"/>
+                <a:cs typeface="Calibri" pitchFamily="34" charset="-120"/>
+              </a:rPr>
+              <a:t>Board-Style Review</a:t>
+            </a:r>
+            <a:endParaRPr lang="en-US" sz="2600" dirty="0"/>
+          </a:p>
+        </p:txBody>
+      </p:sp>
+      <p:sp>
+        <p:nvSpPr>
+          <p:cNvPr id="4" name="Text 2"/>
+          <p:cNvSpPr/>
+          <p:nvPr/>
+        </p:nvSpPr>
+        <p:spPr>
+          <a:xfrm>
+            <a:off x="566928" y="1417320"/>
+            <a:ext cx="11057839" cy="914400"/>
+          </a:xfrm>
+          <a:prstGeom prst="rect">
+            <a:avLst/>
+          </a:prstGeom>
+          <a:noFill/>
+          <a:ln/>
+        </p:spPr>
+        <p:txBody>
+          <a:bodyPr wrap="square" lIns="0" tIns="0" rIns="0" bIns="0" rtlCol="0" anchor="t"/>
+          <a:lstStyle/>
+          <a:p>
+            <a:pPr algn="l" indent="0" marL="0">
+              <a:lnSpc>
+                <a:spcPct val="105000"/>
+              </a:lnSpc>
+              <a:buNone/>
+            </a:pPr>
+            <a:r>
+              <a:rPr lang="en-US" sz="1450" b="1" dirty="0">
+                <a:solidFill>
+                  <a:srgbClr val="1B2A38"/>
+                </a:solidFill>
+                <a:latin typeface="Calibri" pitchFamily="34" charset="0"/>
+                <a:ea typeface="Calibri" pitchFamily="34" charset="-122"/>
+                <a:cs typeface="Calibri" pitchFamily="34" charset="-120"/>
+              </a:rPr>
+              <a:t>A bleeding patient with DIC has a fibrinogen of 80 mg/dL. Which product most directly and efficiently replaces fibrinogen?</a:t>
+            </a:r>
+            <a:endParaRPr lang="en-US" sz="1450" dirty="0"/>
+          </a:p>
+        </p:txBody>
+      </p:sp>
+      <p:sp>
+        <p:nvSpPr>
+          <p:cNvPr id="5" name="Text 3"/>
+          <p:cNvSpPr/>
+          <p:nvPr/>
+        </p:nvSpPr>
+        <p:spPr>
+          <a:xfrm>
+            <a:off x="658368" y="2395728"/>
+            <a:ext cx="6192390" cy="3017520"/>
+          </a:xfrm>
+          <a:prstGeom prst="rect">
+            <a:avLst/>
+          </a:prstGeom>
+          <a:noFill/>
+          <a:ln/>
+        </p:spPr>
+        <p:txBody>
+          <a:bodyPr wrap="square" lIns="0" tIns="0" rIns="0" bIns="0" rtlCol="0" anchor="t"/>
+          <a:lstStyle/>
+          <a:p>
+            <a:pPr algn="l" indent="0" marL="0">
+              <a:spcAft>
+                <a:spcPts val="600"/>
+              </a:spcAft>
+              <a:buNone/>
+            </a:pPr>
+            <a:r>
+              <a:rPr lang="en-US" sz="1350" dirty="0">
+                <a:solidFill>
+                  <a:srgbClr val="33444F"/>
+                </a:solidFill>
+                <a:latin typeface="Calibri" pitchFamily="34" charset="0"/>
+                <a:ea typeface="Calibri" pitchFamily="34" charset="-122"/>
+                <a:cs typeface="Calibri" pitchFamily="34" charset="-120"/>
+              </a:rPr>
+              <a:t>A. Packed red cells</a:t>
+            </a:r>
+            <a:endParaRPr lang="en-US" sz="1350" dirty="0"/>
+          </a:p>
+          <a:p>
+            <a:pPr algn="l" indent="0" marL="0">
+              <a:spcAft>
+                <a:spcPts val="600"/>
+              </a:spcAft>
+              <a:buNone/>
+            </a:pPr>
+            <a:r>
+              <a:rPr lang="en-US" sz="1350" dirty="0">
+                <a:solidFill>
+                  <a:srgbClr val="33444F"/>
+                </a:solidFill>
+                <a:latin typeface="Calibri" pitchFamily="34" charset="0"/>
+                <a:ea typeface="Calibri" pitchFamily="34" charset="-122"/>
+                <a:cs typeface="Calibri" pitchFamily="34" charset="-120"/>
+              </a:rPr>
+              <a:t>B. Platelets</a:t>
+            </a:r>
+            <a:endParaRPr lang="en-US" sz="1350" dirty="0"/>
+          </a:p>
+          <a:p>
+            <a:pPr algn="l" indent="0" marL="0">
+              <a:spcAft>
+                <a:spcPts val="600"/>
+              </a:spcAft>
+              <a:buNone/>
+            </a:pPr>
+            <a:r>
+              <a:rPr lang="en-US" sz="1350" b="1" dirty="0">
+                <a:solidFill>
+                  <a:srgbClr val="7A0E3C"/>
+                </a:solidFill>
+                <a:latin typeface="Calibri" pitchFamily="34" charset="0"/>
+                <a:ea typeface="Calibri" pitchFamily="34" charset="-122"/>
+                <a:cs typeface="Calibri" pitchFamily="34" charset="-120"/>
+              </a:rPr>
+              <a:t>C. Cryoprecipitate</a:t>
+            </a:r>
+            <a:endParaRPr lang="en-US" sz="1350" dirty="0"/>
+          </a:p>
+          <a:p>
+            <a:pPr algn="l" indent="0" marL="0">
+              <a:spcAft>
+                <a:spcPts val="600"/>
+              </a:spcAft>
+              <a:buNone/>
+            </a:pPr>
+            <a:r>
+              <a:rPr lang="en-US" sz="1350" dirty="0">
+                <a:solidFill>
+                  <a:srgbClr val="33444F"/>
+                </a:solidFill>
+                <a:latin typeface="Calibri" pitchFamily="34" charset="0"/>
+                <a:ea typeface="Calibri" pitchFamily="34" charset="-122"/>
+                <a:cs typeface="Calibri" pitchFamily="34" charset="-120"/>
+              </a:rPr>
+              <a:t>D. Albumin</a:t>
+            </a:r>
+            <a:endParaRPr lang="en-US" sz="1350" dirty="0"/>
+          </a:p>
+          <a:p>
+            <a:pPr algn="l" indent="0" marL="0">
+              <a:spcAft>
+                <a:spcPts val="600"/>
+              </a:spcAft>
+              <a:buNone/>
+            </a:pPr>
+            <a:r>
+              <a:rPr lang="en-US" sz="1350" dirty="0">
+                <a:solidFill>
+                  <a:srgbClr val="33444F"/>
+                </a:solidFill>
+                <a:latin typeface="Calibri" pitchFamily="34" charset="0"/>
+                <a:ea typeface="Calibri" pitchFamily="34" charset="-122"/>
+                <a:cs typeface="Calibri" pitchFamily="34" charset="-120"/>
+              </a:rPr>
+              <a:t>E. Normal saline</a:t>
+            </a:r>
+            <a:endParaRPr lang="en-US" sz="1350" dirty="0"/>
+          </a:p>
+        </p:txBody>
+      </p:sp>
+      <p:sp>
+        <p:nvSpPr>
+          <p:cNvPr id="6" name="Shape 4"/>
+          <p:cNvSpPr/>
+          <p:nvPr/>
+        </p:nvSpPr>
+        <p:spPr>
+          <a:xfrm>
+            <a:off x="7201632" y="2395728"/>
+            <a:ext cx="4423136" cy="3246120"/>
+          </a:xfrm>
+          <a:prstGeom prst="roundRect">
+            <a:avLst>
+              <a:gd name="adj" fmla="val 2535"/>
+            </a:avLst>
+          </a:prstGeom>
+          <a:solidFill>
+            <a:srgbClr val="F8E7EF"/>
+          </a:solidFill>
+          <a:ln/>
+          <a:effectLst>
+            <a:outerShdw sx="100000" sy="100000" kx="0" ky="0" algn="bl" rotWithShape="0" blurRad="88900" dist="25400" dir="5400000">
+              <a:srgbClr val="22303C">
+                <a:alpha val="12000"/>
+              </a:srgbClr>
+            </a:outerShdw>
+          </a:effectLst>
+        </p:spPr>
+        <p:txBody>
+          <a:bodyPr/>
+          <a:p/>
+        </p:txBody>
+      </p:sp>
+      <p:sp>
+        <p:nvSpPr>
+          <p:cNvPr id="7" name="Text 5"/>
+          <p:cNvSpPr/>
+          <p:nvPr/>
+        </p:nvSpPr>
+        <p:spPr>
+          <a:xfrm>
+            <a:off x="7439376" y="2578608"/>
+            <a:ext cx="3965936" cy="457200"/>
+          </a:xfrm>
+          <a:prstGeom prst="rect">
+            <a:avLst/>
+          </a:prstGeom>
+          <a:noFill/>
+          <a:ln/>
+        </p:spPr>
+        <p:txBody>
+          <a:bodyPr wrap="square" lIns="0" tIns="0" rIns="0" bIns="0" rtlCol="0" anchor="ctr"/>
+          <a:lstStyle/>
+          <a:p>
+            <a:pPr indent="0" marL="0">
+              <a:buNone/>
+            </a:pPr>
+            <a:r>
+              <a:rPr lang="en-US" sz="1500" b="1" dirty="0">
+                <a:solidFill>
+                  <a:srgbClr val="AD1457"/>
+                </a:solidFill>
+                <a:latin typeface="Calibri" pitchFamily="34" charset="0"/>
+                <a:ea typeface="Calibri" pitchFamily="34" charset="-122"/>
+                <a:cs typeface="Calibri" pitchFamily="34" charset="-120"/>
+              </a:rPr>
+              <a:t>ANSWER  </a:t>
+            </a:r>
+            <a:pPr indent="0" marL="0">
+              <a:buNone/>
+            </a:pPr>
+            <a:r>
+              <a:rPr lang="en-US" sz="1500" b="1" dirty="0">
+                <a:solidFill>
+                  <a:srgbClr val="1B2A38"/>
+                </a:solidFill>
+                <a:latin typeface="Calibri" pitchFamily="34" charset="0"/>
+                <a:ea typeface="Calibri" pitchFamily="34" charset="-122"/>
+                <a:cs typeface="Calibri" pitchFamily="34" charset="-120"/>
+              </a:rPr>
+              <a:t>C — Cryoprecipitate</a:t>
+            </a:r>
+            <a:endParaRPr lang="en-US" sz="1500" dirty="0"/>
+          </a:p>
+        </p:txBody>
+      </p:sp>
+      <p:sp>
+        <p:nvSpPr>
+          <p:cNvPr id="8" name="Text 6"/>
+          <p:cNvSpPr/>
+          <p:nvPr/>
+        </p:nvSpPr>
+        <p:spPr>
+          <a:xfrm>
+            <a:off x="7439376" y="3127248"/>
+            <a:ext cx="3947648" cy="2377440"/>
+          </a:xfrm>
+          <a:prstGeom prst="rect">
+            <a:avLst/>
+          </a:prstGeom>
+          <a:noFill/>
+          <a:ln/>
+        </p:spPr>
+        <p:txBody>
+          <a:bodyPr wrap="square" lIns="0" tIns="0" rIns="0" bIns="0" rtlCol="0" anchor="t"/>
+          <a:lstStyle/>
+          <a:p>
+            <a:pPr algn="l" indent="0" marL="0">
+              <a:lnSpc>
+                <a:spcPct val="108000"/>
+              </a:lnSpc>
+              <a:buNone/>
+            </a:pPr>
+            <a:r>
+              <a:rPr lang="en-US" sz="1250" dirty="0">
+                <a:solidFill>
+                  <a:srgbClr val="33444F"/>
+                </a:solidFill>
+                <a:latin typeface="Calibri" pitchFamily="34" charset="0"/>
+                <a:ea typeface="Calibri" pitchFamily="34" charset="-122"/>
+                <a:cs typeface="Calibri" pitchFamily="34" charset="-120"/>
+              </a:rPr>
+              <a:t>Cryoprecipitate is the concentrated source of fibrinogen (also FVIII, vWF, FXIII) and is first-line for hypofibrinogenemia. Fibrinogen concentrate is an alternative where available.</a:t>
+            </a:r>
+            <a:endParaRPr lang="en-US" sz="1250" dirty="0"/>
+          </a:p>
+        </p:txBody>
+      </p:sp>
+      <p:sp>
+        <p:nvSpPr>
+          <p:cNvPr id="9" name="Text 7"/>
+          <p:cNvSpPr/>
+          <p:nvPr/>
+        </p:nvSpPr>
+        <p:spPr>
+          <a:xfrm>
+            <a:off x="566928" y="6473952"/>
+            <a:ext cx="7772400" cy="274320"/>
+          </a:xfrm>
+          <a:prstGeom prst="rect">
+            <a:avLst/>
+          </a:prstGeom>
+          <a:noFill/>
+          <a:ln/>
+        </p:spPr>
+        <p:txBody>
+          <a:bodyPr wrap="square" lIns="0" tIns="0" rIns="0" bIns="0" rtlCol="0" anchor="ctr"/>
+          <a:lstStyle/>
+          <a:p>
+            <a:pPr algn="l" indent="0" marL="0">
+              <a:buNone/>
+            </a:pPr>
+            <a:r>
+              <a:rPr lang="en-US" sz="850" dirty="0">
+                <a:solidFill>
+                  <a:srgbClr val="9AA8B4"/>
+                </a:solidFill>
+                <a:latin typeface="Calibri" pitchFamily="34" charset="0"/>
+                <a:ea typeface="Calibri" pitchFamily="34" charset="-122"/>
+                <a:cs typeface="Calibri" pitchFamily="34" charset="-120"/>
+              </a:rPr>
+              <a:t>Makassed General Hospital  ·  Department of Laboratory Medicine</a:t>
+            </a:r>
+            <a:endParaRPr lang="en-US" sz="850" dirty="0"/>
+          </a:p>
+        </p:txBody>
+      </p:sp>
+      <p:sp>
+        <p:nvSpPr>
+          <p:cNvPr id="10" name="Text 8"/>
+          <p:cNvSpPr/>
+          <p:nvPr/>
+        </p:nvSpPr>
+        <p:spPr>
+          <a:xfrm>
+            <a:off x="9814255" y="6473952"/>
+            <a:ext cx="1828800" cy="274320"/>
+          </a:xfrm>
+          <a:prstGeom prst="rect">
+            <a:avLst/>
+          </a:prstGeom>
+          <a:noFill/>
+          <a:ln/>
+        </p:spPr>
+        <p:txBody>
+          <a:bodyPr wrap="square" lIns="0" tIns="0" rIns="0" bIns="0" rtlCol="0" anchor="ctr"/>
+          <a:lstStyle/>
+          <a:p>
+            <a:pPr algn="r" indent="0" marL="0">
+              <a:buNone/>
+            </a:pPr>
+            <a:r>
+              <a:rPr lang="en-US" sz="850" dirty="0">
+                <a:solidFill>
+                  <a:srgbClr val="9AA8B4"/>
+                </a:solidFill>
+                <a:latin typeface="Calibri" pitchFamily="34" charset="0"/>
+                <a:ea typeface="Calibri" pitchFamily="34" charset="-122"/>
+                <a:cs typeface="Calibri" pitchFamily="34" charset="-120"/>
+              </a:rPr>
+              <a:t>CP Lecture Series</a:t>
+            </a:r>
+            <a:pPr algn="r" indent="0" marL="0">
+              <a:buNone/>
+            </a:pPr>
+            <a:r>
+              <a:rPr lang="en-US" sz="850" dirty="0">
+                <a:solidFill>
+                  <a:srgbClr val="DCE4EC"/>
+                </a:solidFill>
+                <a:latin typeface="Calibri" pitchFamily="34" charset="0"/>
+                <a:ea typeface="Calibri" pitchFamily="34" charset="-122"/>
+                <a:cs typeface="Calibri" pitchFamily="34" charset="-120"/>
+              </a:rPr>
+              <a:t>   ·   </a:t>
+            </a:r>
+            <a:pPr algn="r" indent="0" marL="0">
+              <a:buNone/>
+            </a:pPr>
+            <a:r>
+              <a:rPr lang="en-US" sz="850" b="1" dirty="0">
+                <a:solidFill>
+                  <a:srgbClr val="AD1457"/>
+                </a:solidFill>
+                <a:latin typeface="Calibri" pitchFamily="34" charset="0"/>
+                <a:ea typeface="Calibri" pitchFamily="34" charset="-122"/>
+                <a:cs typeface="Calibri" pitchFamily="34" charset="-120"/>
+              </a:rPr>
+              <a:t>21</a:t>
+            </a:r>
+            <a:endParaRPr lang="en-US" sz="850" dirty="0"/>
+          </a:p>
+        </p:txBody>
+      </p:sp>
+    </p:spTree>
+  </p:cSld>
+  <p:clrMapOvr>
+    <a:masterClrMapping/>
+  </p:clrMapOvr>
+</p:sld>
+</file>
+
+<file path=ppt/slides/slide34.xml><?xml version="1.0" encoding="utf-8"?>
+<p:sld xmlns:a="http://schemas.openxmlformats.org/drawingml/2006/main" xmlns:p="http://schemas.openxmlformats.org/presentationml/2006/main" xmlns:r="http://schemas.openxmlformats.org/officeDocument/2006/relationships">
+  <p:cSld>
+    <p:spTree>
+      <p:nvGrpSpPr>
+        <p:cNvPr id="1" name=""/>
+        <p:cNvGrpSpPr/>
+        <p:nvPr/>
+      </p:nvGrpSpPr>
+      <p:grpSpPr/>
+      <p:sp>
+        <p:nvSpPr>
+          <p:cNvPr id="2" name="Text 0"/>
+          <p:cNvSpPr/>
+          <p:nvPr/>
+        </p:nvSpPr>
+        <p:spPr>
+          <a:xfrm>
+            <a:off x="566928" y="329184"/>
+            <a:ext cx="10515600" cy="310896"/>
+          </a:xfrm>
+          <a:prstGeom prst="rect">
+            <a:avLst/>
+          </a:prstGeom>
+          <a:noFill/>
+          <a:ln/>
+        </p:spPr>
+        <p:txBody>
+          <a:bodyPr wrap="square" lIns="0" tIns="0" rIns="0" bIns="0" rtlCol="0" anchor="ctr"/>
+          <a:lstStyle/>
+          <a:p>
+            <a:pPr algn="l" indent="0" marL="0">
+              <a:buNone/>
+            </a:pPr>
+            <a:r>
+              <a:rPr lang="en-US" sz="1100" b="1" spc="150" kern="0" dirty="0">
+                <a:solidFill>
+                  <a:srgbClr val="AD1457"/>
+                </a:solidFill>
+                <a:latin typeface="Calibri" pitchFamily="34" charset="0"/>
+                <a:ea typeface="Calibri" pitchFamily="34" charset="-122"/>
+                <a:cs typeface="Calibri" pitchFamily="34" charset="-120"/>
+              </a:rPr>
+              <a:t>TRANSFUSION MEDICINE   ·   BOARD REVIEW  ·  Q1</a:t>
+            </a:r>
+            <a:endParaRPr lang="en-US" sz="1100" dirty="0"/>
+          </a:p>
+        </p:txBody>
+      </p:sp>
+      <p:sp>
+        <p:nvSpPr>
+          <p:cNvPr id="3" name="Text 1"/>
+          <p:cNvSpPr/>
+          <p:nvPr/>
+        </p:nvSpPr>
+        <p:spPr>
+          <a:xfrm>
+            <a:off x="566928" y="713232"/>
+            <a:ext cx="11064240" cy="749808"/>
+          </a:xfrm>
+          <a:prstGeom prst="rect">
+            <a:avLst/>
+          </a:prstGeom>
+          <a:noFill/>
+          <a:ln/>
+        </p:spPr>
+        <p:txBody>
+          <a:bodyPr wrap="square" lIns="0" tIns="0" rIns="0" bIns="0" rtlCol="0" anchor="ctr"/>
+          <a:lstStyle/>
+          <a:p>
+            <a:pPr algn="l" indent="0" marL="0">
+              <a:buNone/>
+            </a:pPr>
+            <a:r>
+              <a:rPr lang="en-US" sz="2600" b="1" dirty="0">
+                <a:solidFill>
+                  <a:srgbClr val="0E3A5F"/>
+                </a:solidFill>
+                <a:latin typeface="Calibri" pitchFamily="34" charset="0"/>
+                <a:ea typeface="Calibri" pitchFamily="34" charset="-122"/>
+                <a:cs typeface="Calibri" pitchFamily="34" charset="-120"/>
+              </a:rPr>
+              <a:t>Board-Style Review</a:t>
+            </a:r>
+            <a:endParaRPr lang="en-US" sz="2600" dirty="0"/>
+          </a:p>
+        </p:txBody>
+      </p:sp>
+      <p:sp>
+        <p:nvSpPr>
+          <p:cNvPr id="4" name="Text 2"/>
+          <p:cNvSpPr/>
+          <p:nvPr/>
+        </p:nvSpPr>
+        <p:spPr>
+          <a:xfrm>
+            <a:off x="566928" y="1417320"/>
+            <a:ext cx="11057839" cy="914400"/>
+          </a:xfrm>
+          <a:prstGeom prst="rect">
+            <a:avLst/>
+          </a:prstGeom>
+          <a:noFill/>
+          <a:ln/>
+        </p:spPr>
+        <p:txBody>
+          <a:bodyPr wrap="square" lIns="0" tIns="0" rIns="0" bIns="0" rtlCol="0" anchor="t"/>
+          <a:lstStyle/>
+          <a:p>
+            <a:pPr algn="l" indent="0" marL="0">
+              <a:lnSpc>
+                <a:spcPct val="105000"/>
+              </a:lnSpc>
+              <a:buNone/>
+            </a:pPr>
+            <a:r>
+              <a:rPr lang="en-US" sz="1450" b="1" dirty="0">
+                <a:solidFill>
+                  <a:srgbClr val="1B2A38"/>
+                </a:solidFill>
+                <a:latin typeface="Calibri" pitchFamily="34" charset="0"/>
+                <a:ea typeface="Calibri" pitchFamily="34" charset="-122"/>
+                <a:cs typeface="Calibri" pitchFamily="34" charset="-120"/>
+              </a:rPr>
+              <a:t>For most stable, hospitalized adults without active cardiac ischemia, the evidence supports which red-cell transfusion threshold?</a:t>
+            </a:r>
+            <a:endParaRPr lang="en-US" sz="1450" dirty="0"/>
+          </a:p>
+        </p:txBody>
+      </p:sp>
+      <p:sp>
+        <p:nvSpPr>
+          <p:cNvPr id="5" name="Text 3"/>
+          <p:cNvSpPr/>
+          <p:nvPr/>
+        </p:nvSpPr>
+        <p:spPr>
+          <a:xfrm>
+            <a:off x="658368" y="2395728"/>
+            <a:ext cx="6192390" cy="3017520"/>
+          </a:xfrm>
+          <a:prstGeom prst="rect">
+            <a:avLst/>
+          </a:prstGeom>
+          <a:noFill/>
+          <a:ln/>
+        </p:spPr>
+        <p:txBody>
+          <a:bodyPr wrap="square" lIns="0" tIns="0" rIns="0" bIns="0" rtlCol="0" anchor="t"/>
+          <a:lstStyle/>
+          <a:p>
+            <a:pPr algn="l" indent="0" marL="0">
+              <a:spcAft>
+                <a:spcPts val="600"/>
+              </a:spcAft>
+              <a:buNone/>
+            </a:pPr>
+            <a:r>
+              <a:rPr lang="en-US" sz="1350" dirty="0">
+                <a:solidFill>
+                  <a:srgbClr val="33444F"/>
+                </a:solidFill>
+                <a:latin typeface="Calibri" pitchFamily="34" charset="0"/>
+                <a:ea typeface="Calibri" pitchFamily="34" charset="-122"/>
+                <a:cs typeface="Calibri" pitchFamily="34" charset="-120"/>
+              </a:rPr>
+              <a:t>A. Hemoglobin 10 g/dL</a:t>
+            </a:r>
+            <a:endParaRPr lang="en-US" sz="1350" dirty="0"/>
+          </a:p>
+          <a:p>
+            <a:pPr algn="l" indent="0" marL="0">
+              <a:spcAft>
+                <a:spcPts val="600"/>
+              </a:spcAft>
+              <a:buNone/>
+            </a:pPr>
+            <a:r>
+              <a:rPr lang="en-US" sz="1350" dirty="0">
+                <a:solidFill>
+                  <a:srgbClr val="33444F"/>
+                </a:solidFill>
+                <a:latin typeface="Calibri" pitchFamily="34" charset="0"/>
+                <a:ea typeface="Calibri" pitchFamily="34" charset="-122"/>
+                <a:cs typeface="Calibri" pitchFamily="34" charset="-120"/>
+              </a:rPr>
+              <a:t>B. Hemoglobin 9 g/dL</a:t>
+            </a:r>
+            <a:endParaRPr lang="en-US" sz="1350" dirty="0"/>
+          </a:p>
+          <a:p>
+            <a:pPr algn="l" indent="0" marL="0">
+              <a:spcAft>
+                <a:spcPts val="600"/>
+              </a:spcAft>
+              <a:buNone/>
+            </a:pPr>
+            <a:r>
+              <a:rPr lang="en-US" sz="1350" b="1" dirty="0">
+                <a:solidFill>
+                  <a:srgbClr val="7A0E3C"/>
+                </a:solidFill>
+                <a:latin typeface="Calibri" pitchFamily="34" charset="0"/>
+                <a:ea typeface="Calibri" pitchFamily="34" charset="-122"/>
+                <a:cs typeface="Calibri" pitchFamily="34" charset="-120"/>
+              </a:rPr>
+              <a:t>C. A restrictive threshold around 7 g/dL</a:t>
+            </a:r>
+            <a:endParaRPr lang="en-US" sz="1350" dirty="0"/>
+          </a:p>
+          <a:p>
+            <a:pPr algn="l" indent="0" marL="0">
+              <a:spcAft>
+                <a:spcPts val="600"/>
+              </a:spcAft>
+              <a:buNone/>
+            </a:pPr>
+            <a:r>
+              <a:rPr lang="en-US" sz="1350" dirty="0">
+                <a:solidFill>
+                  <a:srgbClr val="33444F"/>
+                </a:solidFill>
+                <a:latin typeface="Calibri" pitchFamily="34" charset="0"/>
+                <a:ea typeface="Calibri" pitchFamily="34" charset="-122"/>
+                <a:cs typeface="Calibri" pitchFamily="34" charset="-120"/>
+              </a:rPr>
+              <a:t>D. Transfuse based on hematocrit &gt; 30% only</a:t>
+            </a:r>
+            <a:endParaRPr lang="en-US" sz="1350" dirty="0"/>
+          </a:p>
+          <a:p>
+            <a:pPr algn="l" indent="0" marL="0">
+              <a:spcAft>
+                <a:spcPts val="600"/>
+              </a:spcAft>
+              <a:buNone/>
+            </a:pPr>
+            <a:r>
+              <a:rPr lang="en-US" sz="1350" dirty="0">
+                <a:solidFill>
+                  <a:srgbClr val="33444F"/>
+                </a:solidFill>
+                <a:latin typeface="Calibri" pitchFamily="34" charset="0"/>
+                <a:ea typeface="Calibri" pitchFamily="34" charset="-122"/>
+                <a:cs typeface="Calibri" pitchFamily="34" charset="-120"/>
+              </a:rPr>
+              <a:t>E. Transfuse all symptomatic and asymptomatic anemia</a:t>
+            </a:r>
+            <a:endParaRPr lang="en-US" sz="1350" dirty="0"/>
+          </a:p>
+        </p:txBody>
+      </p:sp>
+      <p:sp>
+        <p:nvSpPr>
+          <p:cNvPr id="6" name="Shape 4"/>
+          <p:cNvSpPr/>
+          <p:nvPr/>
+        </p:nvSpPr>
+        <p:spPr>
+          <a:xfrm>
+            <a:off x="7201632" y="2395728"/>
+            <a:ext cx="4423136" cy="3246120"/>
+          </a:xfrm>
+          <a:prstGeom prst="roundRect">
+            <a:avLst>
+              <a:gd name="adj" fmla="val 2535"/>
+            </a:avLst>
+          </a:prstGeom>
+          <a:solidFill>
+            <a:srgbClr val="F8E7EF"/>
+          </a:solidFill>
+          <a:ln/>
+          <a:effectLst>
+            <a:outerShdw sx="100000" sy="100000" kx="0" ky="0" algn="bl" rotWithShape="0" blurRad="88900" dist="25400" dir="5400000">
+              <a:srgbClr val="22303C">
+                <a:alpha val="12000"/>
+              </a:srgbClr>
+            </a:outerShdw>
+          </a:effectLst>
+        </p:spPr>
+        <p:txBody>
+          <a:bodyPr/>
+          <a:p/>
+        </p:txBody>
+      </p:sp>
+      <p:sp>
+        <p:nvSpPr>
+          <p:cNvPr id="7" name="Text 5"/>
+          <p:cNvSpPr/>
+          <p:nvPr/>
+        </p:nvSpPr>
+        <p:spPr>
+          <a:xfrm>
+            <a:off x="7439376" y="2578608"/>
+            <a:ext cx="3965936" cy="457200"/>
+          </a:xfrm>
+          <a:prstGeom prst="rect">
+            <a:avLst/>
+          </a:prstGeom>
+          <a:noFill/>
+          <a:ln/>
+        </p:spPr>
+        <p:txBody>
+          <a:bodyPr wrap="square" lIns="0" tIns="0" rIns="0" bIns="0" rtlCol="0" anchor="ctr"/>
+          <a:lstStyle/>
+          <a:p>
+            <a:pPr indent="0" marL="0">
+              <a:buNone/>
+            </a:pPr>
+            <a:r>
+              <a:rPr lang="en-US" sz="1500" b="1" dirty="0">
+                <a:solidFill>
+                  <a:srgbClr val="AD1457"/>
+                </a:solidFill>
+                <a:latin typeface="Calibri" pitchFamily="34" charset="0"/>
+                <a:ea typeface="Calibri" pitchFamily="34" charset="-122"/>
+                <a:cs typeface="Calibri" pitchFamily="34" charset="-120"/>
+              </a:rPr>
+              <a:t>ANSWER  </a:t>
+            </a:r>
+            <a:pPr indent="0" marL="0">
+              <a:buNone/>
+            </a:pPr>
+            <a:r>
+              <a:rPr lang="en-US" sz="1500" b="1" dirty="0">
+                <a:solidFill>
+                  <a:srgbClr val="1B2A38"/>
+                </a:solidFill>
+                <a:latin typeface="Calibri" pitchFamily="34" charset="0"/>
+                <a:ea typeface="Calibri" pitchFamily="34" charset="-122"/>
+                <a:cs typeface="Calibri" pitchFamily="34" charset="-120"/>
+              </a:rPr>
+              <a:t>C — Restrictive threshold ~7 g/dL</a:t>
+            </a:r>
+            <a:endParaRPr lang="en-US" sz="1500" dirty="0"/>
+          </a:p>
+        </p:txBody>
+      </p:sp>
+      <p:sp>
+        <p:nvSpPr>
+          <p:cNvPr id="8" name="Text 6"/>
+          <p:cNvSpPr/>
+          <p:nvPr/>
+        </p:nvSpPr>
+        <p:spPr>
+          <a:xfrm>
+            <a:off x="7439376" y="3127248"/>
+            <a:ext cx="3947648" cy="2377440"/>
+          </a:xfrm>
+          <a:prstGeom prst="rect">
+            <a:avLst/>
+          </a:prstGeom>
+          <a:noFill/>
+          <a:ln/>
+        </p:spPr>
+        <p:txBody>
+          <a:bodyPr wrap="square" lIns="0" tIns="0" rIns="0" bIns="0" rtlCol="0" anchor="t"/>
+          <a:lstStyle/>
+          <a:p>
+            <a:pPr algn="l" indent="0" marL="0">
+              <a:lnSpc>
+                <a:spcPct val="108000"/>
+              </a:lnSpc>
+              <a:buNone/>
+            </a:pPr>
+            <a:r>
+              <a:rPr lang="en-US" sz="1250" dirty="0">
+                <a:solidFill>
+                  <a:srgbClr val="33444F"/>
+                </a:solidFill>
+                <a:latin typeface="Calibri" pitchFamily="34" charset="0"/>
+                <a:ea typeface="Calibri" pitchFamily="34" charset="-122"/>
+                <a:cs typeface="Calibri" pitchFamily="34" charset="-120"/>
+              </a:rPr>
+              <a:t>Randomized data show a restrictive strategy (~7 g/dL, ~8 in selected cardiac/peri-operative patients) is as safe as a liberal strategy and reduces exposure. Transfuse for symptoms, not a number.</a:t>
+            </a:r>
+            <a:endParaRPr lang="en-US" sz="1250" dirty="0"/>
+          </a:p>
+        </p:txBody>
+      </p:sp>
+      <p:sp>
+        <p:nvSpPr>
+          <p:cNvPr id="9" name="Text 7"/>
+          <p:cNvSpPr/>
+          <p:nvPr/>
+        </p:nvSpPr>
+        <p:spPr>
+          <a:xfrm>
+            <a:off x="566928" y="6473952"/>
+            <a:ext cx="7772400" cy="274320"/>
+          </a:xfrm>
+          <a:prstGeom prst="rect">
+            <a:avLst/>
+          </a:prstGeom>
+          <a:noFill/>
+          <a:ln/>
+        </p:spPr>
+        <p:txBody>
+          <a:bodyPr wrap="square" lIns="0" tIns="0" rIns="0" bIns="0" rtlCol="0" anchor="ctr"/>
+          <a:lstStyle/>
+          <a:p>
+            <a:pPr algn="l" indent="0" marL="0">
+              <a:buNone/>
+            </a:pPr>
+            <a:r>
+              <a:rPr lang="en-US" sz="850" dirty="0">
+                <a:solidFill>
+                  <a:srgbClr val="9AA8B4"/>
+                </a:solidFill>
+                <a:latin typeface="Calibri" pitchFamily="34" charset="0"/>
+                <a:ea typeface="Calibri" pitchFamily="34" charset="-122"/>
+                <a:cs typeface="Calibri" pitchFamily="34" charset="-120"/>
+              </a:rPr>
+              <a:t>Makassed General Hospital  ·  Department of Laboratory Medicine</a:t>
+            </a:r>
+            <a:endParaRPr lang="en-US" sz="850" dirty="0"/>
+          </a:p>
+        </p:txBody>
+      </p:sp>
+      <p:sp>
+        <p:nvSpPr>
+          <p:cNvPr id="10" name="Text 8"/>
+          <p:cNvSpPr/>
+          <p:nvPr/>
+        </p:nvSpPr>
+        <p:spPr>
+          <a:xfrm>
+            <a:off x="9814255" y="6473952"/>
+            <a:ext cx="1828800" cy="274320"/>
+          </a:xfrm>
+          <a:prstGeom prst="rect">
+            <a:avLst/>
+          </a:prstGeom>
+          <a:noFill/>
+          <a:ln/>
+        </p:spPr>
+        <p:txBody>
+          <a:bodyPr wrap="square" lIns="0" tIns="0" rIns="0" bIns="0" rtlCol="0" anchor="ctr"/>
+          <a:lstStyle/>
+          <a:p>
+            <a:pPr algn="r" indent="0" marL="0">
+              <a:buNone/>
+            </a:pPr>
+            <a:r>
+              <a:rPr lang="en-US" sz="850" dirty="0">
+                <a:solidFill>
+                  <a:srgbClr val="9AA8B4"/>
+                </a:solidFill>
+                <a:latin typeface="Calibri" pitchFamily="34" charset="0"/>
+                <a:ea typeface="Calibri" pitchFamily="34" charset="-122"/>
+                <a:cs typeface="Calibri" pitchFamily="34" charset="-120"/>
+              </a:rPr>
+              <a:t>CP Lecture Series</a:t>
+            </a:r>
+            <a:pPr algn="r" indent="0" marL="0">
+              <a:buNone/>
+            </a:pPr>
+            <a:r>
+              <a:rPr lang="en-US" sz="850" dirty="0">
+                <a:solidFill>
+                  <a:srgbClr val="DCE4EC"/>
+                </a:solidFill>
+                <a:latin typeface="Calibri" pitchFamily="34" charset="0"/>
+                <a:ea typeface="Calibri" pitchFamily="34" charset="-122"/>
+                <a:cs typeface="Calibri" pitchFamily="34" charset="-120"/>
+              </a:rPr>
+              <a:t>   ·   </a:t>
+            </a:r>
+            <a:pPr algn="r" indent="0" marL="0">
+              <a:buNone/>
+            </a:pPr>
+            <a:r>
+              <a:rPr lang="en-US" sz="850" b="1" dirty="0">
+                <a:solidFill>
+                  <a:srgbClr val="AD1457"/>
+                </a:solidFill>
+                <a:latin typeface="Calibri" pitchFamily="34" charset="0"/>
+                <a:ea typeface="Calibri" pitchFamily="34" charset="-122"/>
+                <a:cs typeface="Calibri" pitchFamily="34" charset="-120"/>
+              </a:rPr>
+              <a:t>20</a:t>
+            </a:r>
+            <a:endParaRPr lang="en-US" sz="850" dirty="0"/>
+          </a:p>
+        </p:txBody>
+      </p:sp>
+    </p:spTree>
+  </p:cSld>
+  <p:clrMapOvr>
+    <a:masterClrMapping/>
+  </p:clrMapOvr>
+</p:sld>
+</file>
+
 <file path=ppt/slides/slide4.xml><?xml version="1.0" encoding="utf-8"?>
 <p:sld xmlns:a="http://schemas.openxmlformats.org/drawingml/2006/main" xmlns:r="http://schemas.openxmlformats.org/officeDocument/2006/relationships" xmlns:p="http://schemas.openxmlformats.org/presentationml/2006/main">
   <p:cSld name="Slide 4">
@@ -14864,6 +16568,10 @@
             </a:outerShdw>
           </a:effectLst>
         </p:spPr>
+        <p:txBody>
+          <a:bodyPr/>
+          <a:p/>
+        </p:txBody>
       </p:sp>
       <p:sp>
         <p:nvSpPr>
@@ -14891,6 +16599,10 @@
             </a:outerShdw>
           </a:effectLst>
         </p:spPr>
+        <p:txBody>
+          <a:bodyPr/>
+          <a:p/>
+        </p:txBody>
       </p:sp>
       <p:sp>
         <p:nvSpPr>
@@ -15005,6 +16717,10 @@
           </a:solidFill>
           <a:ln/>
         </p:spPr>
+        <p:txBody>
+          <a:bodyPr/>
+          <a:p/>
+        </p:txBody>
       </p:sp>
       <p:sp>
         <p:nvSpPr>
@@ -15032,6 +16748,10 @@
             </a:outerShdw>
           </a:effectLst>
         </p:spPr>
+        <p:txBody>
+          <a:bodyPr/>
+          <a:p/>
+        </p:txBody>
       </p:sp>
       <p:sp>
         <p:nvSpPr>
@@ -15153,6 +16873,10 @@
             </a:outerShdw>
           </a:effectLst>
         </p:spPr>
+        <p:txBody>
+          <a:bodyPr/>
+          <a:p/>
+        </p:txBody>
       </p:sp>
       <p:sp>
         <p:nvSpPr>
@@ -15180,6 +16904,10 @@
             </a:outerShdw>
           </a:effectLst>
         </p:spPr>
+        <p:txBody>
+          <a:bodyPr/>
+          <a:p/>
+        </p:txBody>
       </p:sp>
       <p:sp>
         <p:nvSpPr>
@@ -15294,6 +17022,10 @@
           </a:solidFill>
           <a:ln/>
         </p:spPr>
+        <p:txBody>
+          <a:bodyPr/>
+          <a:p/>
+        </p:txBody>
       </p:sp>
       <p:sp>
         <p:nvSpPr>
@@ -15321,6 +17053,10 @@
             </a:outerShdw>
           </a:effectLst>
         </p:spPr>
+        <p:txBody>
+          <a:bodyPr/>
+          <a:p/>
+        </p:txBody>
       </p:sp>
       <p:sp>
         <p:nvSpPr>
@@ -15442,6 +17178,10 @@
             </a:outerShdw>
           </a:effectLst>
         </p:spPr>
+        <p:txBody>
+          <a:bodyPr/>
+          <a:p/>
+        </p:txBody>
       </p:sp>
       <p:sp>
         <p:nvSpPr>
@@ -15469,6 +17209,10 @@
             </a:outerShdw>
           </a:effectLst>
         </p:spPr>
+        <p:txBody>
+          <a:bodyPr/>
+          <a:p/>
+        </p:txBody>
       </p:sp>
       <p:sp>
         <p:nvSpPr>
@@ -15721,6 +17465,10 @@
           </a:solidFill>
           <a:ln/>
         </p:spPr>
+        <p:txBody>
+          <a:bodyPr/>
+          <a:p/>
+        </p:txBody>
       </p:sp>
       <p:sp>
         <p:nvSpPr>
@@ -15743,6 +17491,10 @@
           </a:solidFill>
           <a:ln/>
         </p:spPr>
+        <p:txBody>
+          <a:bodyPr/>
+          <a:p/>
+        </p:txBody>
       </p:sp>
       <p:sp>
         <p:nvSpPr>
@@ -16004,6 +17756,10 @@
             </a:outerShdw>
           </a:effectLst>
         </p:spPr>
+        <p:txBody>
+          <a:bodyPr/>
+          <a:p/>
+        </p:txBody>
       </p:sp>
       <p:pic>
         <p:nvPicPr>
@@ -17969,6 +19725,10 @@
             </a:outerShdw>
           </a:effectLst>
         </p:spPr>
+        <p:txBody>
+          <a:bodyPr/>
+          <a:p/>
+        </p:txBody>
       </p:sp>
       <p:sp>
         <p:nvSpPr>
@@ -18143,6 +19903,10 @@
             </a:outerShdw>
           </a:effectLst>
         </p:spPr>
+        <p:txBody>
+          <a:bodyPr/>
+          <a:p/>
+        </p:txBody>
       </p:sp>
       <p:sp>
         <p:nvSpPr>
@@ -18448,6 +20212,10 @@
           </a:solidFill>
           <a:ln/>
         </p:spPr>
+        <p:txBody>
+          <a:bodyPr/>
+          <a:p/>
+        </p:txBody>
       </p:sp>
       <p:sp>
         <p:nvSpPr>
@@ -18470,6 +20238,10 @@
           </a:solidFill>
           <a:ln/>
         </p:spPr>
+        <p:txBody>
+          <a:bodyPr/>
+          <a:p/>
+        </p:txBody>
       </p:sp>
       <p:sp>
         <p:nvSpPr>
